--- a/papers/paper1-chaos-cpa/presentation.pptx
+++ b/papers/paper1-chaos-cpa/presentation.pptx
@@ -2992,7 +2992,7 @@
                   <a:srgbClr val="1F3355"/>
                 </a:solidFill>
               </a:rPr>
-              <a:t>A chi-square test rejects uniformity for the logistic (χ² ≈ 5.3×10⁵) and Lorenz keystreams.</a:t>
+              <a:t>A chi-square test rejects uniformity for the logistic (chi^2 ~ 5.3×10^5) and Lorenz keystreams.</a:t>
             </a:r>
           </a:p>
           <a:p>
@@ -3102,8 +3102,8 @@
         </p:nvSpPr>
         <p:spPr>
           <a:xfrm>
-            <a:off x="0" y="1783080"/>
-            <a:ext cx="0" cy="4114800"/>
+            <a:off x="640080" y="1783080"/>
+            <a:ext cx="10927080" cy="4114800"/>
           </a:xfrm>
         </p:spPr>
         <p:txBody>
@@ -3212,8 +3212,8 @@
         </p:nvSpPr>
         <p:spPr>
           <a:xfrm>
-            <a:off x="0" y="1783080"/>
-            <a:ext cx="0" cy="4114800"/>
+            <a:off x="640080" y="1783080"/>
+            <a:ext cx="10927080" cy="4114800"/>
           </a:xfrm>
         </p:spPr>
         <p:txBody>
@@ -3337,8 +3337,8 @@
         </p:nvSpPr>
         <p:spPr>
           <a:xfrm>
-            <a:off x="0" y="1783080"/>
-            <a:ext cx="0" cy="4114800"/>
+            <a:off x="640080" y="1783080"/>
+            <a:ext cx="10927080" cy="4114800"/>
           </a:xfrm>
         </p:spPr>
         <p:txBody>
@@ -3371,7 +3371,7 @@
                   <a:srgbClr val="1F3355"/>
                 </a:solidFill>
               </a:rPr>
-              <a:t>Cost scales logarithmically: 3 chosen plaintexts at 128²/256², 4 at 512²/1024², each under 0.3 s.</a:t>
+              <a:t>Cost scales logarithmically: 3 chosen plaintexts at 128^2/256^2, 4 at 512^2/1024^2, each under 0.3 s.</a:t>
             </a:r>
           </a:p>
           <a:p>
@@ -3447,8 +3447,8 @@
         </p:nvSpPr>
         <p:spPr>
           <a:xfrm>
-            <a:off x="0" y="1783080"/>
-            <a:ext cx="0" cy="4114800"/>
+            <a:off x="640080" y="1783080"/>
+            <a:ext cx="10927080" cy="4114800"/>
           </a:xfrm>
         </p:spPr>
         <p:txBody>
@@ -3674,8 +3674,8 @@
         </p:nvSpPr>
         <p:spPr>
           <a:xfrm>
-            <a:off x="0" y="1783080"/>
-            <a:ext cx="0" cy="4114800"/>
+            <a:off x="640080" y="1783080"/>
+            <a:ext cx="10927080" cy="4114800"/>
           </a:xfrm>
         </p:spPr>
         <p:txBody>
@@ -3999,8 +3999,8 @@
         </p:nvSpPr>
         <p:spPr>
           <a:xfrm>
-            <a:off x="0" y="1783080"/>
-            <a:ext cx="0" cy="4114800"/>
+            <a:off x="640080" y="1783080"/>
+            <a:ext cx="10927080" cy="4114800"/>
           </a:xfrm>
         </p:spPr>
         <p:txBody>
@@ -4018,7 +4018,7 @@
                   <a:srgbClr val="1F3355"/>
                 </a:solidFill>
               </a:rPr>
-              <a:t>Index the image as a length-n vector, n = M·N. Each step is linear over ℤ₂₅₆ and fixed by the key.</a:t>
+              <a:t>Index the image as a length-n vector, n = M·N. Each step is linear over Z_256 and fixed by the key.</a:t>
             </a:r>
           </a:p>
           <a:p>
@@ -4048,7 +4048,7 @@
                   <a:srgbClr val="1F3355"/>
                 </a:solidFill>
               </a:rPr>
-              <a:t>Therefore  C[j] = K[s(j)] · X[s(j)]  (mod 256),  with s = P⁻¹ — a fixed monomial map.</a:t>
+              <a:t>Therefore  C[j] = K[s(j)] · X[s(j)]  (mod 256),  with s = P^-1 — a fixed monomial map.</a:t>
             </a:r>
           </a:p>
           <a:p>
@@ -4124,8 +4124,8 @@
         </p:nvSpPr>
         <p:spPr>
           <a:xfrm>
-            <a:off x="0" y="1783080"/>
-            <a:ext cx="0" cy="4114800"/>
+            <a:off x="640080" y="1783080"/>
+            <a:ext cx="10927080" cy="4114800"/>
           </a:xfrm>
         </p:spPr>
         <p:txBody>
@@ -4143,7 +4143,7 @@
                   <a:srgbClr val="1F3355"/>
                 </a:solidFill>
               </a:rPr>
-              <a:t>(a) Multiplier — one query: encrypt the all-ones image → C[j] = K[s(j)] (the multiplier at every output position).</a:t>
+              <a:t>(a) Multiplier — one query: encrypt the all-ones image -&gt; C[j] = K[s(j)] (the multiplier at every output position).</a:t>
             </a:r>
           </a:p>
           <a:p>
@@ -4158,7 +4158,7 @@
                   <a:srgbClr val="1F3355"/>
                 </a:solidFill>
               </a:rPr>
-              <a:t>(b) Permutation — ⌈log₂₅₆ n⌉ queries: index-digit images; divide by the known K → recover the source map s.</a:t>
+              <a:t>(b) Permutation — ceil(log_256 n) queries: index-digit images; divide by the known K -&gt; recover the source map s.</a:t>
             </a:r>
           </a:p>
           <a:p>
@@ -4173,7 +4173,7 @@
                   <a:srgbClr val="1F3355"/>
                 </a:solidFill>
               </a:rPr>
-              <a:t>Equivalent key (s, K) inverts any ciphertext:  X[s(j)] = K[s(j)]⁻¹ · C[j].</a:t>
+              <a:t>Equivalent key (s, K) inverts any ciphertext:  X[s(j)] = K[s(j)]^-1 · C[j].</a:t>
             </a:r>
           </a:p>
           <a:p>
@@ -4188,7 +4188,7 @@
                   <a:srgbClr val="1F3355"/>
                 </a:solidFill>
               </a:rPr>
-              <a:t>Cost: 1 + ⌈log₂₅₆ MN⌉ chosen plaintexts = 4 for a 512×512 image — independent of the advertised key length.</a:t>
+              <a:t>Cost: 1 + ceil(log_256 MN) chosen plaintexts = 4 for a 512×512 image — independent of the advertised key length.</a:t>
             </a:r>
           </a:p>
           <a:p>
@@ -4264,8 +4264,8 @@
         </p:nvSpPr>
         <p:spPr>
           <a:xfrm>
-            <a:off x="0" y="1783080"/>
-            <a:ext cx="0" cy="4114800"/>
+            <a:off x="640080" y="1783080"/>
+            <a:ext cx="10927080" cy="4114800"/>
           </a:xfrm>
         </p:spPr>
         <p:txBody>
@@ -4498,7 +4498,7 @@
                   <a:srgbClr val="555555"/>
                 </a:solidFill>
               </a:rPr>
-              <a:t>Original → LLEO ciphertext → key-free recovery (bit-identical), four images.</a:t>
+              <a:t>Original -&gt; LLEO ciphertext -&gt; key-free recovery (bit-identical), four images.</a:t>
             </a:r>
           </a:p>
         </p:txBody>
@@ -4542,7 +4542,7 @@
                   <a:srgbClr val="1F3355"/>
                 </a:solidFill>
               </a:rPr>
-              <a:t>Good statistics ≠ security</a:t>
+              <a:t>Good statistics are not security</a:t>
             </a:r>
           </a:p>
         </p:txBody>
@@ -4658,7 +4658,7 @@
                   <a:srgbClr val="555555"/>
                 </a:solidFill>
               </a:rPr>
-              <a:t>Adjacent-pixel density: structure → uniform</a:t>
+              <a:t>Adjacent-pixel density: structure -&gt; uniform</a:t>
             </a:r>
           </a:p>
         </p:txBody>
@@ -4696,7 +4696,7 @@
                   <a:srgbClr val="1F3355"/>
                 </a:solidFill>
               </a:rPr>
-              <a:t>Cipher entropy 7.23 → 7.99 (near-ideal 8); adjacent-pixel correlation ≈ −0.007 (near zero); flat histogram.</a:t>
+              <a:t>Cipher entropy 7.23 -&gt; 7.99 (near-ideal 8); adjacent-pixel correlation ~ -0.007 (near zero); flat histogram.</a:t>
             </a:r>
           </a:p>
           <a:p>
@@ -4817,7 +4817,7 @@
                   <a:srgbClr val="1F3355"/>
                 </a:solidFill>
               </a:rPr>
-              <a:t>LLEO reports NPCR ≈ 99.6% as differential-attack resistance.</a:t>
+              <a:t>LLEO reports NPCR ~ 99.6% as differential-attack resistance.</a:t>
             </a:r>
           </a:p>
           <a:p>
@@ -4832,7 +4832,7 @@
                   <a:srgbClr val="1F3355"/>
                 </a:solidFill>
               </a:rPr>
-              <a:t>No diffusion → a one-pixel change alters exactly one ciphertext pixel: true NPCR = 100/MN ≈ 0.0004%.</a:t>
+              <a:t>No diffusion -&gt; a one-pixel change alters exactly one ciphertext pixel: true NPCR = 100/MN ~ 0.0004%.</a:t>
             </a:r>
           </a:p>
           <a:p>
@@ -4881,7 +4881,7 @@
                   <a:srgbClr val="555555"/>
                 </a:solidFill>
               </a:rPr>
-              <a:t>|C₀−C₁|: dark = unchanged, bright = changed (one fixed key).</a:t>
+              <a:t>|C_0-C_1|: dark = unchanged, bright = changed (one fixed key).</a:t>
             </a:r>
           </a:p>
         </p:txBody>

--- a/papers/paper1-chaos-cpa/presentation.pptx
+++ b/papers/paper1-chaos-cpa/presentation.pptx
@@ -2841,7 +2841,7 @@
         </p:spPr>
         <p:txBody>
           <a:bodyPr wrap="square">
-            <a:spAutoFit/>
+            <a:normAutofit/>
           </a:bodyPr>
           <a:lstStyle/>
           <a:p>
@@ -2930,7 +2930,7 @@
                   <a:srgbClr val="1F3355"/>
                 </a:solidFill>
               </a:rPr>
-              <a:t>The chaotic keystreams are themselves non-uniform</a:t>
+              <a:t>Even the chaotic keystreams are not evenly random</a:t>
             </a:r>
           </a:p>
         </p:txBody>
@@ -2968,7 +2968,7 @@
         <p:spPr>
           <a:xfrm>
             <a:off x="7498080" y="1600200"/>
-            <a:ext cx="4663440" cy="4023360"/>
+            <a:ext cx="4663440" cy="4206240"/>
           </a:xfrm>
           <a:prstGeom prst="rect">
             <a:avLst/>
@@ -2977,7 +2977,7 @@
         </p:spPr>
         <p:txBody>
           <a:bodyPr wrap="square">
-            <a:spAutoFit/>
+            <a:normAutofit/>
           </a:bodyPr>
           <a:lstStyle/>
           <a:p>
@@ -2987,12 +2987,12 @@
               </a:spcAft>
             </a:pPr>
             <a:r>
-              <a:rPr sz="1700">
-                <a:solidFill>
-                  <a:srgbClr val="1F3355"/>
-                </a:solidFill>
-              </a:rPr>
-              <a:t>A chi-square test rejects uniformity for the logistic (chi^2 ~ 5.3×10^5) and Lorenz keystreams.</a:t>
+              <a:rPr sz="1600">
+                <a:solidFill>
+                  <a:srgbClr val="1F3355"/>
+                </a:solidFill>
+              </a:rPr>
+              <a:t>A chi-square test (a standard check for whether values are evenly spread) strongly rejects “evenly random” for both chaotic streams (logistic chi^2 ~ 5.3×10^5).</a:t>
             </a:r>
           </a:p>
           <a:p>
@@ -3002,12 +3002,12 @@
               </a:spcAft>
             </a:pPr>
             <a:r>
-              <a:rPr sz="1700">
-                <a:solidFill>
-                  <a:srgbClr val="1F3355"/>
-                </a:solidFill>
-              </a:rPr>
-              <a:t>A secure stream cipher would match the flat uniform row.</a:t>
+              <a:rPr sz="1600">
+                <a:solidFill>
+                  <a:srgbClr val="1F3355"/>
+                </a:solidFill>
+              </a:rPr>
+              <a:t>A secure keystream would be flat, like the uniform reference row at the bottom.</a:t>
             </a:r>
           </a:p>
         </p:txBody>
@@ -3041,7 +3041,7 @@
                   <a:srgbClr val="555555"/>
                 </a:solidFill>
               </a:rPr>
-              <a:t>Byte-value densities: logistic and Lorenz vs. a uniform reference.</a:t>
+              <a:t>How often each byte value appears: logistic and Lorenz vs. a truly uniform source.</a:t>
             </a:r>
           </a:p>
         </p:txBody>
@@ -3107,7 +3107,9 @@
           </a:xfrm>
         </p:spPr>
         <p:txBody>
-          <a:bodyPr wrap="square"/>
+          <a:bodyPr wrap="square">
+            <a:normAutofit/>
+          </a:bodyPr>
           <a:lstStyle/>
           <a:p>
             <a:pPr>
@@ -3116,7 +3118,7 @@
               </a:spcAft>
             </a:pPr>
             <a:r>
-              <a:rPr sz="2000">
+              <a:rPr sz="1800">
                 <a:solidFill>
                   <a:srgbClr val="1F3355"/>
                 </a:solidFill>
@@ -3131,7 +3133,7 @@
               </a:spcAft>
             </a:pPr>
             <a:r>
-              <a:rPr sz="2000">
+              <a:rPr sz="1800">
                 <a:solidFill>
                   <a:srgbClr val="1F3355"/>
                 </a:solidFill>
@@ -3146,7 +3148,7 @@
               </a:spcAft>
             </a:pPr>
             <a:r>
-              <a:rPr sz="2000">
+              <a:rPr sz="1800">
                 <a:solidFill>
                   <a:srgbClr val="1F3355"/>
                 </a:solidFill>
@@ -3217,7 +3219,9 @@
           </a:xfrm>
         </p:spPr>
         <p:txBody>
-          <a:bodyPr wrap="square"/>
+          <a:bodyPr wrap="square">
+            <a:normAutofit/>
+          </a:bodyPr>
           <a:lstStyle/>
           <a:p>
             <a:pPr>
@@ -3226,7 +3230,7 @@
               </a:spcAft>
             </a:pPr>
             <a:r>
-              <a:rPr sz="2000">
+              <a:rPr sz="1800">
                 <a:solidFill>
                   <a:srgbClr val="1F3355"/>
                 </a:solidFill>
@@ -3241,12 +3245,12 @@
               </a:spcAft>
             </a:pPr>
             <a:r>
-              <a:rPr sz="2000">
-                <a:solidFill>
-                  <a:srgbClr val="1F3355"/>
-                </a:solidFill>
-              </a:rPr>
-              <a:t>Remedies (standard): (i) make the keystream plaintext-dependent (e.g., seed the chaos from SHA-256 of the image); (ii) add genuine diffusion (a chaining rule).</a:t>
+              <a:rPr sz="1800">
+                <a:solidFill>
+                  <a:srgbClr val="1F3355"/>
+                </a:solidFill>
+              </a:rPr>
+              <a:t>Remedies (standard): (i) tie the keystream to the image — e.g., seed the chaos from a SHA-256 hash (a fixed-size fingerprint of the image); (ii) add real diffusion, e.g., a chaining rule so each output pixel also depends on the previous one.</a:t>
             </a:r>
           </a:p>
           <a:p>
@@ -3256,12 +3260,12 @@
               </a:spcAft>
             </a:pPr>
             <a:r>
-              <a:rPr sz="2000">
-                <a:solidFill>
-                  <a:srgbClr val="1F3355"/>
-                </a:solidFill>
-              </a:rPr>
-              <a:t>Positive control: the identical attack recovers 100% of pixels against the key-only cipher, but only 0.25% (chance) once the keystream is SHA-256-seeded.</a:t>
+              <a:rPr sz="1800">
+                <a:solidFill>
+                  <a:srgbClr val="1F3355"/>
+                </a:solidFill>
+              </a:rPr>
+              <a:t>Sanity check: the identical attack recovers 100% of pixels against the original key-only cipher, but only 0.25% (no better than guessing) once the keystream is seeded from the image's hash.</a:t>
             </a:r>
           </a:p>
           <a:p>
@@ -3271,12 +3275,12 @@
               </a:spcAft>
             </a:pPr>
             <a:r>
-              <a:rPr sz="2000">
-                <a:solidFill>
-                  <a:srgbClr val="1F3355"/>
-                </a:solidFill>
-              </a:rPr>
-              <a:t>Statistical scores should accompany — not replace — an explicit chosen-plaintext argument. Responsible disclosure to the authors before camera-ready.</a:t>
+              <a:rPr sz="1800">
+                <a:solidFill>
+                  <a:srgbClr val="1F3355"/>
+                </a:solidFill>
+              </a:rPr>
+              <a:t>Statistical scores should support — not replace — an explicit chosen-plaintext security argument. The authors will be notified before camera-ready (responsible disclosure).</a:t>
             </a:r>
           </a:p>
         </p:txBody>
@@ -3342,7 +3346,9 @@
           </a:xfrm>
         </p:spPr>
         <p:txBody>
-          <a:bodyPr wrap="square"/>
+          <a:bodyPr wrap="square">
+            <a:normAutofit/>
+          </a:bodyPr>
           <a:lstStyle/>
           <a:p>
             <a:pPr>
@@ -3351,12 +3357,12 @@
               </a:spcAft>
             </a:pPr>
             <a:r>
-              <a:rPr sz="2000">
-                <a:solidFill>
-                  <a:srgbClr val="1F3355"/>
-                </a:solidFill>
-              </a:rPr>
-              <a:t>A canonical CBC-like XOR diffusion chain (different algebra) is affine over GF(2); recovered exactly in 3 chosen plaintexts at 128×128.</a:t>
+              <a:rPr sz="1800">
+                <a:solidFill>
+                  <a:srgbClr val="1F3355"/>
+                </a:solidFill>
+              </a:rPr>
+              <a:t>A second, very different cipher family (an XOR-and-chain design, like CBC) also reduces to one simple fixed equation; we recover it exactly in 3 chosen plaintexts at 128×128.</a:t>
             </a:r>
           </a:p>
           <a:p>
@@ -3366,12 +3372,12 @@
               </a:spcAft>
             </a:pPr>
             <a:r>
-              <a:rPr sz="2000">
-                <a:solidFill>
-                  <a:srgbClr val="1F3355"/>
-                </a:solidFill>
-              </a:rPr>
-              <a:t>Cost scales logarithmically: 3 chosen plaintexts at 128^2/256^2, 4 at 512^2/1024^2, each under 0.3 s.</a:t>
+              <a:rPr sz="1800">
+                <a:solidFill>
+                  <a:srgbClr val="1F3355"/>
+                </a:solidFill>
+              </a:rPr>
+              <a:t>Cost grows only logarithmically — i.e. barely — with image size: 3 chosen plaintexts at 128^2/256^2, 4 at 512^2/1024^2, each under 0.3 s.</a:t>
             </a:r>
           </a:p>
           <a:p>
@@ -3381,12 +3387,12 @@
               </a:spcAft>
             </a:pPr>
             <a:r>
-              <a:rPr sz="2000">
-                <a:solidFill>
-                  <a:srgbClr val="1F3355"/>
-                </a:solidFill>
-              </a:rPr>
-              <a:t>The same procedure fails against a plaintext-hash-seeded version — confirming that what matters is the keystream's dependence on the image, not the algebra or round count.</a:t>
+              <a:rPr sz="1800">
+                <a:solidFill>
+                  <a:srgbClr val="1F3355"/>
+                </a:solidFill>
+              </a:rPr>
+              <a:t>The same procedure fails once the keystream is tied to a hash of the image — confirming that what matters is image-dependence, not the algebra or the number of rounds.</a:t>
             </a:r>
           </a:p>
         </p:txBody>
@@ -3452,7 +3458,9 @@
           </a:xfrm>
         </p:spPr>
         <p:txBody>
-          <a:bodyPr wrap="square"/>
+          <a:bodyPr wrap="square">
+            <a:normAutofit/>
+          </a:bodyPr>
           <a:lstStyle/>
           <a:p>
             <a:pPr>
@@ -3461,7 +3469,7 @@
               </a:spcAft>
             </a:pPr>
             <a:r>
-              <a:rPr sz="2000">
+              <a:rPr sz="1800">
                 <a:solidFill>
                   <a:srgbClr val="1F3355"/>
                 </a:solidFill>
@@ -3476,7 +3484,7 @@
               </a:spcAft>
             </a:pPr>
             <a:r>
-              <a:rPr sz="2000">
+              <a:rPr sz="1800">
                 <a:solidFill>
                   <a:srgbClr val="1F3355"/>
                 </a:solidFill>
@@ -3491,7 +3499,7 @@
               </a:spcAft>
             </a:pPr>
             <a:r>
-              <a:rPr sz="2000">
+              <a:rPr sz="1800">
                 <a:solidFill>
                   <a:srgbClr val="1F3355"/>
                 </a:solidFill>
@@ -3506,7 +3514,7 @@
               </a:spcAft>
             </a:pPr>
             <a:r>
-              <a:rPr sz="2000">
+              <a:rPr sz="1800">
                 <a:solidFill>
                   <a:srgbClr val="1F3355"/>
                 </a:solidFill>
@@ -3521,7 +3529,7 @@
               </a:spcAft>
             </a:pPr>
             <a:r>
-              <a:rPr sz="2000">
+              <a:rPr sz="1800">
                 <a:solidFill>
                   <a:srgbClr val="1F3355"/>
                 </a:solidFill>
@@ -3598,7 +3606,7 @@
         </p:spPr>
         <p:txBody>
           <a:bodyPr wrap="square">
-            <a:spAutoFit/>
+            <a:normAutofit/>
           </a:bodyPr>
           <a:lstStyle/>
           <a:p>
@@ -3679,7 +3687,9 @@
           </a:xfrm>
         </p:spPr>
         <p:txBody>
-          <a:bodyPr wrap="square"/>
+          <a:bodyPr wrap="square">
+            <a:normAutofit/>
+          </a:bodyPr>
           <a:lstStyle/>
           <a:p>
             <a:pPr>
@@ -3688,12 +3698,12 @@
               </a:spcAft>
             </a:pPr>
             <a:r>
-              <a:rPr sz="2000">
-                <a:solidFill>
-                  <a:srgbClr val="1F3355"/>
-                </a:solidFill>
-              </a:rPr>
-              <a:t>Chaos-based image ciphers are published at a high rate; most follow a permutation–diffusion template (confusion + a chaotic keystream).</a:t>
+              <a:rPr sz="1800">
+                <a:solidFill>
+                  <a:srgbClr val="1F3355"/>
+                </a:solidFill>
+              </a:rPr>
+              <a:t>Chaos-based image ciphers scramble a picture using chaotic (random-looking) math. Most follow a permutation–diffusion design: first shuffle the pixels around (confusion), then mask their values with a keystream — a long random-looking sequence the cipher mixes in (diffusion).</a:t>
             </a:r>
           </a:p>
           <a:p>
@@ -3703,12 +3713,12 @@
               </a:spcAft>
             </a:pPr>
             <a:r>
-              <a:rPr sz="2000">
-                <a:solidFill>
-                  <a:srgbClr val="1F3355"/>
-                </a:solidFill>
-              </a:rPr>
-              <a:t>Recurring lesson: when the keystream depends only on the key (not the image), the whole cipher is a fixed map — an equivalent key decrypts everything from a few chosen plaintexts.</a:t>
+              <a:rPr sz="1800">
+                <a:solidFill>
+                  <a:srgbClr val="1F3355"/>
+                </a:solidFill>
+              </a:rPr>
+              <a:t>Recurring lesson: if that keystream depends only on the secret key (never on the image), the whole cipher is one fixed transformation — so an equivalent key (a stand-in that decrypts any image without being the real key) can be recovered from a few chosen plaintexts (images the attacker picks and has the cipher encrypt).</a:t>
             </a:r>
           </a:p>
           <a:p>
@@ -3718,12 +3728,12 @@
               </a:spcAft>
             </a:pPr>
             <a:r>
-              <a:rPr sz="2000">
-                <a:solidFill>
-                  <a:srgbClr val="1F3355"/>
-                </a:solidFill>
-              </a:rPr>
-              <a:t>Second, methodological problem: schemes are validated with statistics (entropy, correlation, NPCR/UACI) and near-ideal values are treated as security.</a:t>
+              <a:rPr sz="1800">
+                <a:solidFill>
+                  <a:srgbClr val="1F3355"/>
+                </a:solidFill>
+              </a:rPr>
+              <a:t>Second problem (method): schemes are judged by statistics — entropy (a randomness score), neighbouring-pixel correlation, NPCR/UACI — and near-ideal values are treated as proof of security.</a:t>
             </a:r>
           </a:p>
           <a:p>
@@ -3733,12 +3743,12 @@
               </a:spcAft>
             </a:pPr>
             <a:r>
-              <a:rPr sz="1800">
+              <a:rPr sz="1600">
                 <a:solidFill>
                   <a:srgbClr val="555555"/>
                 </a:solidFill>
               </a:rPr>
-              <a:t>None of those scores measures chosen-plaintext resistance.</a:t>
+              <a:t>But none of those scores tests resistance to a chosen-plaintext attack.</a:t>
             </a:r>
           </a:p>
           <a:p>
@@ -3748,7 +3758,7 @@
               </a:spcAft>
             </a:pPr>
             <a:r>
-              <a:rPr sz="2000">
+              <a:rPr sz="1800">
                 <a:solidFill>
                   <a:srgbClr val="1F3355"/>
                 </a:solidFill>
@@ -3835,7 +3845,7 @@
         <p:spPr>
           <a:xfrm>
             <a:off x="8211312" y="1600200"/>
-            <a:ext cx="3950208" cy="4023360"/>
+            <a:ext cx="3950208" cy="4206240"/>
           </a:xfrm>
           <a:prstGeom prst="rect">
             <a:avLst/>
@@ -3844,7 +3854,7 @@
         </p:spPr>
         <p:txBody>
           <a:bodyPr wrap="square">
-            <a:spAutoFit/>
+            <a:normAutofit/>
           </a:bodyPr>
           <a:lstStyle/>
           <a:p>
@@ -3854,12 +3864,12 @@
               </a:spcAft>
             </a:pPr>
             <a:r>
-              <a:rPr sz="1700">
-                <a:solidFill>
-                  <a:srgbClr val="1F3355"/>
-                </a:solidFill>
-              </a:rPr>
-              <a:t>Lorenz + logistic keystreams drive a per-pixel multiplicative substitution (×K).</a:t>
+              <a:rPr sz="1600">
+                <a:solidFill>
+                  <a:srgbClr val="1F3355"/>
+                </a:solidFill>
+              </a:rPr>
+              <a:t>Two chaotic maps (simple formulas whose output looks random — Lorenz and logistic) make the keystream that masks each pixel (multiply by K).</a:t>
             </a:r>
           </a:p>
           <a:p>
@@ -3869,12 +3879,12 @@
               </a:spcAft>
             </a:pPr>
             <a:r>
-              <a:rPr sz="1700">
-                <a:solidFill>
-                  <a:srgbClr val="1F3355"/>
-                </a:solidFill>
-              </a:rPr>
-              <a:t>Then two Fisher–Yates block shuffles (16 rows, 16 columns).</a:t>
+              <a:rPr sz="1600">
+                <a:solidFill>
+                  <a:srgbClr val="1F3355"/>
+                </a:solidFill>
+              </a:rPr>
+              <a:t>Then two Fisher–Yates shuffles (a standard way to randomly reorder a list) rearrange 16 row-blocks, then 16 column-blocks.</a:t>
             </a:r>
           </a:p>
           <a:p>
@@ -3884,12 +3894,12 @@
               </a:spcAft>
             </a:pPr>
             <a:r>
-              <a:rPr sz="1700">
-                <a:solidFill>
-                  <a:srgbClr val="1F3355"/>
-                </a:solidFill>
-              </a:rPr>
-              <a:t>Every key element derives from the secret key — nothing depends on the image X.</a:t>
+              <a:rPr sz="1600">
+                <a:solidFill>
+                  <a:srgbClr val="1F3355"/>
+                </a:solidFill>
+              </a:rPr>
+              <a:t>Every key element comes from the secret key alone — nothing depends on the image X.</a:t>
             </a:r>
           </a:p>
           <a:p>
@@ -3899,12 +3909,12 @@
               </a:spcAft>
             </a:pPr>
             <a:r>
-              <a:rPr sz="1700">
-                <a:solidFill>
-                  <a:srgbClr val="1F3355"/>
-                </a:solidFill>
-              </a:rPr>
-              <a:t>Called “asymmetric,” but the same keys encrypt and decrypt: it is symmetric.</a:t>
+              <a:rPr sz="1600">
+                <a:solidFill>
+                  <a:srgbClr val="1F3355"/>
+                </a:solidFill>
+              </a:rPr>
+              <a:t>Called “asymmetric,” but the same keys both encrypt and decrypt: it is really symmetric.</a:t>
             </a:r>
           </a:p>
         </p:txBody>
@@ -3982,7 +3992,7 @@
                   <a:srgbClr val="1F3355"/>
                 </a:solidFill>
               </a:rPr>
-              <a:t>Key insight: LLEO is a fixed monomial map</a:t>
+              <a:t>Key insight: LLEO is one fixed “multiply-and-reorder” map</a:t>
             </a:r>
           </a:p>
         </p:txBody>
@@ -4004,7 +4014,9 @@
           </a:xfrm>
         </p:spPr>
         <p:txBody>
-          <a:bodyPr wrap="square"/>
+          <a:bodyPr wrap="square">
+            <a:normAutofit/>
+          </a:bodyPr>
           <a:lstStyle/>
           <a:p>
             <a:pPr>
@@ -4013,12 +4025,12 @@
               </a:spcAft>
             </a:pPr>
             <a:r>
-              <a:rPr sz="2000">
-                <a:solidFill>
-                  <a:srgbClr val="1F3355"/>
-                </a:solidFill>
-              </a:rPr>
-              <a:t>Index the image as a length-n vector, n = M·N. Each step is linear over Z_256 and fixed by the key.</a:t>
+              <a:rPr sz="1800">
+                <a:solidFill>
+                  <a:srgbClr val="1F3355"/>
+                </a:solidFill>
+              </a:rPr>
+              <a:t>Write the image as a list of n = M×N pixels. Every step is just multiply-and-reorder using arithmetic that wraps around at 256 (like hours on a clock), and is fixed once the key is set.</a:t>
             </a:r>
           </a:p>
           <a:p>
@@ -4028,12 +4040,12 @@
               </a:spcAft>
             </a:pPr>
             <a:r>
-              <a:rPr sz="2000">
-                <a:solidFill>
-                  <a:srgbClr val="1F3355"/>
-                </a:solidFill>
-              </a:rPr>
-              <a:t>Substitution multiplies pixel p by a fixed odd unit K[p]; the two shuffles compose into one permutation P.</a:t>
+              <a:rPr sz="1800">
+                <a:solidFill>
+                  <a:srgbClr val="1F3355"/>
+                </a:solidFill>
+              </a:rPr>
+              <a:t>Masking multiplies pixel p by a fixed odd number K[p] (odd, so it can always be divided back out); the two shuffles combine into one fixed reordering of positions.</a:t>
             </a:r>
           </a:p>
           <a:p>
@@ -4043,12 +4055,12 @@
               </a:spcAft>
             </a:pPr>
             <a:r>
-              <a:rPr sz="2000">
-                <a:solidFill>
-                  <a:srgbClr val="1F3355"/>
-                </a:solidFill>
-              </a:rPr>
-              <a:t>Therefore  C[j] = K[s(j)] · X[s(j)]  (mod 256),  with s = P^-1 — a fixed monomial map.</a:t>
+              <a:rPr sz="1800">
+                <a:solidFill>
+                  <a:srgbClr val="1F3355"/>
+                </a:solidFill>
+              </a:rPr>
+              <a:t>So  C[j] = K[s(j)] · X[s(j)]  (mod 256): each output pixel is exactly one input pixel times a fixed number — a “monomial” map.</a:t>
             </a:r>
           </a:p>
           <a:p>
@@ -4058,12 +4070,12 @@
               </a:spcAft>
             </a:pPr>
             <a:r>
-              <a:rPr sz="2000">
-                <a:solidFill>
-                  <a:srgbClr val="1F3355"/>
-                </a:solidFill>
-              </a:rPr>
-              <a:t>No additive constant (E(0)=0); and no diffusion: each C[j] depends on exactly one input pixel.</a:t>
+              <a:rPr sz="1800">
+                <a:solidFill>
+                  <a:srgbClr val="1F3355"/>
+                </a:solidFill>
+              </a:rPr>
+              <a:t>Two gifts to the attacker: no added constant, and no diffusion (each output pixel depends on only one input pixel).</a:t>
             </a:r>
           </a:p>
         </p:txBody>
@@ -4129,7 +4141,9 @@
           </a:xfrm>
         </p:spPr>
         <p:txBody>
-          <a:bodyPr wrap="square"/>
+          <a:bodyPr wrap="square">
+            <a:normAutofit/>
+          </a:bodyPr>
           <a:lstStyle/>
           <a:p>
             <a:pPr>
@@ -4138,12 +4152,12 @@
               </a:spcAft>
             </a:pPr>
             <a:r>
-              <a:rPr sz="2000">
-                <a:solidFill>
-                  <a:srgbClr val="1F3355"/>
-                </a:solidFill>
-              </a:rPr>
-              <a:t>(a) Multiplier — one query: encrypt the all-ones image -&gt; C[j] = K[s(j)] (the multiplier at every output position).</a:t>
+              <a:rPr sz="1800">
+                <a:solidFill>
+                  <a:srgbClr val="1F3355"/>
+                </a:solidFill>
+              </a:rPr>
+              <a:t>(a) The multiplier — 1 query: encrypt an all-ones image; the output directly reveals K at every position.</a:t>
             </a:r>
           </a:p>
           <a:p>
@@ -4153,12 +4167,12 @@
               </a:spcAft>
             </a:pPr>
             <a:r>
-              <a:rPr sz="2000">
-                <a:solidFill>
-                  <a:srgbClr val="1F3355"/>
-                </a:solidFill>
-              </a:rPr>
-              <a:t>(b) Permutation — ceil(log_256 n) queries: index-digit images; divide by the known K -&gt; recover the source map s.</a:t>
+              <a:rPr sz="1800">
+                <a:solidFill>
+                  <a:srgbClr val="1F3355"/>
+                </a:solidFill>
+              </a:rPr>
+              <a:t>(b) The reordering — a few queries: encrypt images whose pixels carry their own position number, then divide out the known K to read off where each pixel came from (the map s).</a:t>
             </a:r>
           </a:p>
           <a:p>
@@ -4168,12 +4182,12 @@
               </a:spcAft>
             </a:pPr>
             <a:r>
-              <a:rPr sz="2000">
-                <a:solidFill>
-                  <a:srgbClr val="1F3355"/>
-                </a:solidFill>
-              </a:rPr>
-              <a:t>Equivalent key (s, K) inverts any ciphertext:  X[s(j)] = K[s(j)]^-1 · C[j].</a:t>
+              <a:rPr sz="1800">
+                <a:solidFill>
+                  <a:srgbClr val="1F3355"/>
+                </a:solidFill>
+              </a:rPr>
+              <a:t>The pair (s, K) is the equivalent key — it inverts any ciphertext:  X[s(j)] = K[s(j)]^-1 · C[j].</a:t>
             </a:r>
           </a:p>
           <a:p>
@@ -4183,12 +4197,12 @@
               </a:spcAft>
             </a:pPr>
             <a:r>
-              <a:rPr sz="2000">
-                <a:solidFill>
-                  <a:srgbClr val="1F3355"/>
-                </a:solidFill>
-              </a:rPr>
-              <a:t>Cost: 1 + ceil(log_256 MN) chosen plaintexts = 4 for a 512×512 image — independent of the advertised key length.</a:t>
+              <a:rPr sz="1800">
+                <a:solidFill>
+                  <a:srgbClr val="1F3355"/>
+                </a:solidFill>
+              </a:rPr>
+              <a:t>Total cost: 1 + ceil(log_256 MN) chosen plaintexts = just 4 for a 512×512 image — no matter how long the advertised key is.</a:t>
             </a:r>
           </a:p>
           <a:p>
@@ -4198,12 +4212,12 @@
               </a:spcAft>
             </a:pPr>
             <a:r>
-              <a:rPr sz="2000">
-                <a:solidFill>
-                  <a:srgbClr val="1F3355"/>
-                </a:solidFill>
-              </a:rPr>
-              <a:t>Order-optimal vs. the Li–Lo permutation-only bound; extra rounds/maps leave the map's form unchanged.</a:t>
+              <a:rPr sz="1800">
+                <a:solidFill>
+                  <a:srgbClr val="1F3355"/>
+                </a:solidFill>
+              </a:rPr>
+              <a:t>This matches the known best-possible bound for shuffle-only ciphers; adding more rounds or maps doesn't change the form, so the same attack still works.</a:t>
             </a:r>
           </a:p>
         </p:txBody>
@@ -4269,7 +4283,9 @@
           </a:xfrm>
         </p:spPr>
         <p:txBody>
-          <a:bodyPr wrap="square"/>
+          <a:bodyPr wrap="square">
+            <a:normAutofit/>
+          </a:bodyPr>
           <a:lstStyle/>
           <a:p>
             <a:pPr>
@@ -4278,7 +4294,7 @@
               </a:spcAft>
             </a:pPr>
             <a:r>
-              <a:rPr sz="2000">
+              <a:rPr sz="1800">
                 <a:solidFill>
                   <a:srgbClr val="1F3355"/>
                 </a:solidFill>
@@ -4293,7 +4309,7 @@
               </a:spcAft>
             </a:pPr>
             <a:r>
-              <a:rPr sz="2000">
+              <a:rPr sz="1800">
                 <a:solidFill>
                   <a:srgbClr val="1F3355"/>
                 </a:solidFill>
@@ -4308,7 +4324,7 @@
               </a:spcAft>
             </a:pPr>
             <a:r>
-              <a:rPr sz="2000">
+              <a:rPr sz="1800">
                 <a:solidFill>
                   <a:srgbClr val="1F3355"/>
                 </a:solidFill>
@@ -4323,7 +4339,7 @@
               </a:spcAft>
             </a:pPr>
             <a:r>
-              <a:rPr sz="2000">
+              <a:rPr sz="1800">
                 <a:solidFill>
                   <a:srgbClr val="1F3355"/>
                 </a:solidFill>
@@ -4410,7 +4426,7 @@
         <p:spPr>
           <a:xfrm>
             <a:off x="8686799" y="1600200"/>
-            <a:ext cx="3474721" cy="4023360"/>
+            <a:ext cx="3474721" cy="4206240"/>
           </a:xfrm>
           <a:prstGeom prst="rect">
             <a:avLst/>
@@ -4419,7 +4435,7 @@
         </p:spPr>
         <p:txBody>
           <a:bodyPr wrap="square">
-            <a:spAutoFit/>
+            <a:normAutofit/>
           </a:bodyPr>
           <a:lstStyle/>
           <a:p>
@@ -4429,7 +4445,7 @@
               </a:spcAft>
             </a:pPr>
             <a:r>
-              <a:rPr sz="1700">
+              <a:rPr sz="1600">
                 <a:solidFill>
                   <a:srgbClr val="1F3355"/>
                 </a:solidFill>
@@ -4444,7 +4460,7 @@
               </a:spcAft>
             </a:pPr>
             <a:r>
-              <a:rPr sz="1700">
+              <a:rPr sz="1600">
                 <a:solidFill>
                   <a:srgbClr val="1F3355"/>
                 </a:solidFill>
@@ -4459,7 +4475,7 @@
               </a:spcAft>
             </a:pPr>
             <a:r>
-              <a:rPr sz="1700">
+              <a:rPr sz="1600">
                 <a:solidFill>
                   <a:srgbClr val="1F3355"/>
                 </a:solidFill>
@@ -4624,7 +4640,7 @@
                   <a:srgbClr val="555555"/>
                 </a:solidFill>
               </a:rPr>
-              <a:t>Flat cipher histogram</a:t>
+              <a:t>Flat histogram of cipher pixel values</a:t>
             </a:r>
           </a:p>
         </p:txBody>
@@ -4658,7 +4674,7 @@
                   <a:srgbClr val="555555"/>
                 </a:solidFill>
               </a:rPr>
-              <a:t>Adjacent-pixel density: structure -&gt; uniform</a:t>
+              <a:t>Neighbouring-pixel pattern: structure -&gt; uniform</a:t>
             </a:r>
           </a:p>
         </p:txBody>
@@ -4671,8 +4687,8 @@
         </p:nvSpPr>
         <p:spPr>
           <a:xfrm>
-            <a:off x="548640" y="4754880"/>
-            <a:ext cx="11155680" cy="1005840"/>
+            <a:off x="548640" y="4709160"/>
+            <a:ext cx="11155680" cy="1143000"/>
           </a:xfrm>
           <a:prstGeom prst="rect">
             <a:avLst/>
@@ -4681,7 +4697,7 @@
         </p:spPr>
         <p:txBody>
           <a:bodyPr wrap="square">
-            <a:spAutoFit/>
+            <a:normAutofit/>
           </a:bodyPr>
           <a:lstStyle/>
           <a:p>
@@ -4691,12 +4707,12 @@
               </a:spcAft>
             </a:pPr>
             <a:r>
-              <a:rPr sz="1600">
-                <a:solidFill>
-                  <a:srgbClr val="1F3355"/>
-                </a:solidFill>
-              </a:rPr>
-              <a:t>Cipher entropy 7.23 -&gt; 7.99 (near-ideal 8); adjacent-pixel correlation ~ -0.007 (near zero); flat histogram.</a:t>
+              <a:rPr sz="1500">
+                <a:solidFill>
+                  <a:srgbClr val="1F3355"/>
+                </a:solidFill>
+              </a:rPr>
+              <a:t>Entropy (a randomness score, maximum 8) rises 7.23 -&gt; 7.99; neighbouring pixels go from very alike to almost unrelated (correlation ~ 0); the spread of pixel values is flat.</a:t>
             </a:r>
           </a:p>
           <a:p>
@@ -4706,12 +4722,12 @@
               </a:spcAft>
             </a:pPr>
             <a:r>
-              <a:rPr sz="1600">
-                <a:solidFill>
-                  <a:srgbClr val="1F3355"/>
-                </a:solidFill>
-              </a:rPr>
-              <a:t>By the usual yardsticks LLEO looks strong — yet it is broken in 4 queries.</a:t>
+              <a:rPr sz="1500">
+                <a:solidFill>
+                  <a:srgbClr val="1F3355"/>
+                </a:solidFill>
+              </a:rPr>
+              <a:t>By every usual yardstick LLEO looks strong — yet it is broken in 4 queries.</a:t>
             </a:r>
           </a:p>
         </p:txBody>
@@ -4755,7 +4771,7 @@
                   <a:srgbClr val="1F3355"/>
                 </a:solidFill>
               </a:rPr>
-              <a:t>The differential metric (NPCR) is illusory</a:t>
+              <a:t>The “differential” score (NPCR) is illusory</a:t>
             </a:r>
           </a:p>
         </p:txBody>
@@ -4793,7 +4809,7 @@
         <p:spPr>
           <a:xfrm>
             <a:off x="7498080" y="1600200"/>
-            <a:ext cx="4663440" cy="4023360"/>
+            <a:ext cx="4663440" cy="4206240"/>
           </a:xfrm>
           <a:prstGeom prst="rect">
             <a:avLst/>
@@ -4802,7 +4818,7 @@
         </p:spPr>
         <p:txBody>
           <a:bodyPr wrap="square">
-            <a:spAutoFit/>
+            <a:normAutofit/>
           </a:bodyPr>
           <a:lstStyle/>
           <a:p>
@@ -4812,12 +4828,12 @@
               </a:spcAft>
             </a:pPr>
             <a:r>
-              <a:rPr sz="1700">
-                <a:solidFill>
-                  <a:srgbClr val="1F3355"/>
-                </a:solidFill>
-              </a:rPr>
-              <a:t>LLEO reports NPCR ~ 99.6% as differential-attack resistance.</a:t>
+              <a:rPr sz="1600">
+                <a:solidFill>
+                  <a:srgbClr val="1F3355"/>
+                </a:solidFill>
+              </a:rPr>
+              <a:t>NPCR = the percent of pixels that change when you flip a single input pixel. A good cipher should change almost all of them (~99.6%), and LLEO reports ~99.6%.</a:t>
             </a:r>
           </a:p>
           <a:p>
@@ -4827,12 +4843,12 @@
               </a:spcAft>
             </a:pPr>
             <a:r>
-              <a:rPr sz="1700">
-                <a:solidFill>
-                  <a:srgbClr val="1F3355"/>
-                </a:solidFill>
-              </a:rPr>
-              <a:t>No diffusion -&gt; a one-pixel change alters exactly one ciphertext pixel: true NPCR = 100/MN ~ 0.0004%.</a:t>
+              <a:rPr sz="1600">
+                <a:solidFill>
+                  <a:srgbClr val="1F3355"/>
+                </a:solidFill>
+              </a:rPr>
+              <a:t>But with no diffusion, flipping one input pixel changes exactly one output pixel — so the true value is 100/MN ~ 0.0004%, five orders of magnitude smaller.</a:t>
             </a:r>
           </a:p>
           <a:p>
@@ -4842,12 +4858,12 @@
               </a:spcAft>
             </a:pPr>
             <a:r>
-              <a:rPr sz="1700">
-                <a:solidFill>
-                  <a:srgbClr val="1F3355"/>
-                </a:solidFill>
-              </a:rPr>
-              <a:t>The 99.6% is merely the gap between unrelated images (here 99.88%) — any near-uniform cipher attains it.</a:t>
+              <a:rPr sz="1600">
+                <a:solidFill>
+                  <a:srgbClr val="1F3355"/>
+                </a:solidFill>
+              </a:rPr>
+              <a:t>The 99.6% is really just the difference between two unrelated images (here 99.88%), which any near-uniform cipher reaches and which says nothing about security.</a:t>
             </a:r>
           </a:p>
         </p:txBody>
@@ -4881,7 +4897,7 @@
                   <a:srgbClr val="555555"/>
                 </a:solidFill>
               </a:rPr>
-              <a:t>|C_0-C_1|: dark = unchanged, bright = changed (one fixed key).</a:t>
+              <a:t>Difference image |C_0-C_1|: dark = unchanged, bright = changed (one fixed key).</a:t>
             </a:r>
           </a:p>
         </p:txBody>

--- a/papers/paper1-chaos-cpa/presentation.pptx
+++ b/papers/paper1-chaos-cpa/presentation.pptx
@@ -23,6 +23,7 @@
     <p:sldId id="268" r:id="rId19"/>
     <p:sldId id="269" r:id="rId20"/>
     <p:sldId id="270" r:id="rId21"/>
+    <p:sldId id="271" r:id="rId22"/>
   </p:sldIdLst>
   <p:sldSz cx="12192000" cy="6858000"/>
   <p:notesSz cx="6858000" cy="9144000"/>
@@ -3085,26 +3086,50 @@
                   <a:srgbClr val="1F3355"/>
                 </a:solidFill>
               </a:rPr>
-              <a:t>Discussion: two persistent failure modes</a:t>
-            </a:r>
-          </a:p>
-        </p:txBody>
-      </p:sp>
-      <p:sp>
-        <p:nvSpPr>
-          <p:cNvPr id="3" name="Content Placeholder 2"/>
-          <p:cNvSpPr>
-            <a:spLocks noGrp="1"/>
-          </p:cNvSpPr>
-          <p:nvPr>
-            <p:ph idx="1"/>
-          </p:nvPr>
-        </p:nvSpPr>
-        <p:spPr>
-          <a:xfrm>
-            <a:off x="640080" y="1783080"/>
-            <a:ext cx="10927080" cy="4114800"/>
-          </a:xfrm>
+              <a:t>The contribution: a structural oracle that retires the genre</a:t>
+            </a:r>
+          </a:p>
+        </p:txBody>
+      </p:sp>
+      <p:pic>
+        <p:nvPicPr>
+          <p:cNvPr id="3" name="Picture 2" descr="p1_oracle_corpus.png"/>
+          <p:cNvPicPr>
+            <a:picLocks noChangeAspect="1"/>
+          </p:cNvPicPr>
+          <p:nvPr/>
+        </p:nvPicPr>
+        <p:blipFill>
+          <a:blip r:embed="rId2"/>
+          <a:stretch>
+            <a:fillRect/>
+          </a:stretch>
+        </p:blipFill>
+        <p:spPr>
+          <a:xfrm>
+            <a:off x="1250685" y="1463040"/>
+            <a:ext cx="5271030" cy="4050792"/>
+          </a:xfrm>
+          <a:prstGeom prst="rect">
+            <a:avLst/>
+          </a:prstGeom>
+        </p:spPr>
+      </p:pic>
+      <p:sp>
+        <p:nvSpPr>
+          <p:cNvPr id="4" name="TextBox 3"/>
+          <p:cNvSpPr txBox="1"/>
+          <p:nvPr/>
+        </p:nvSpPr>
+        <p:spPr>
+          <a:xfrm>
+            <a:off x="7498080" y="1600200"/>
+            <a:ext cx="4663440" cy="4206240"/>
+          </a:xfrm>
+          <a:prstGeom prst="rect">
+            <a:avLst/>
+          </a:prstGeom>
+          <a:noFill/>
         </p:spPr>
         <p:txBody>
           <a:bodyPr wrap="square">
@@ -3112,48 +3137,82 @@
           </a:bodyPr>
           <a:lstStyle/>
           <a:p>
-            <a:pPr>
+            <a:pPr algn="l">
               <a:spcAft>
                 <a:spcPts val="400"/>
               </a:spcAft>
             </a:pPr>
             <a:r>
-              <a:rPr sz="1800">
-                <a:solidFill>
-                  <a:srgbClr val="1F3355"/>
-                </a:solidFill>
-              </a:rPr>
-              <a:t>Good statistics are not security: flat histogram, ideal entropy, near-zero correlation, and a large inter-image NPCR all hold for our fixed, key-only map — broken in 4 queries.</a:t>
-            </a:r>
-          </a:p>
-          <a:p>
-            <a:pPr>
+              <a:rPr sz="1600">
+                <a:solidFill>
+                  <a:srgbClr val="1F3355"/>
+                </a:solidFill>
+              </a:rPr>
+              <a:t>We package the attack as a black-box test: given only the ability to encrypt chosen images, it decides whether a cipher is one fixed plaintext-independent map and, if so, recovers an equivalent key -- knowing nothing about the scheme inside.</a:t>
+            </a:r>
+          </a:p>
+          <a:p>
+            <a:pPr algn="l">
               <a:spcAft>
                 <a:spcPts val="400"/>
               </a:spcAft>
             </a:pPr>
             <a:r>
-              <a:rPr sz="1800">
-                <a:solidFill>
-                  <a:srgbClr val="1F3355"/>
-                </a:solidFill>
-              </a:rPr>
-              <a:t>Naming is not architecture: labelling a symmetric construction “asymmetric” adds no security.</a:t>
-            </a:r>
-          </a:p>
-          <a:p>
-            <a:pPr>
+              <a:rPr sz="1600">
+                <a:solidFill>
+                  <a:srgbClr val="1F3355"/>
+                </a:solidFill>
+              </a:rPr>
+              <a:t>Across 8 schemes it breaks all 5 key-only ones at R = 1 in &lt;= 5 chosen plaintexts: chaos, permutation, additive, affine, and even a modern AES-CTR key stream -- the chaos was never the point; a reused, image-independent keystream is.</a:t>
+            </a:r>
+          </a:p>
+          <a:p>
+            <a:pPr algn="l">
               <a:spcAft>
                 <a:spcPts val="400"/>
               </a:spcAft>
             </a:pPr>
             <a:r>
-              <a:rPr sz="1800">
-                <a:solidFill>
-                  <a:srgbClr val="1F3355"/>
-                </a:solidFill>
-              </a:rPr>
-              <a:t>The single deciding question: does any key material depend on the image?</a:t>
+              <a:rPr sz="1600">
+                <a:solidFill>
+                  <a:srgbClr val="1F3355"/>
+                </a:solidFill>
+              </a:rPr>
+              <a:t>It correctly declines the 2 defended schemes that tie the keystream to the image (SHA-256) or a per-image nonce -- so the test retires the whole genre, not one paper.</a:t>
+            </a:r>
+          </a:p>
+        </p:txBody>
+      </p:sp>
+      <p:sp>
+        <p:nvSpPr>
+          <p:cNvPr id="5" name="TextBox 4"/>
+          <p:cNvSpPr txBox="1"/>
+          <p:nvPr/>
+        </p:nvSpPr>
+        <p:spPr>
+          <a:xfrm>
+            <a:off x="320040" y="5513832"/>
+            <a:ext cx="7132320" cy="365760"/>
+          </a:xfrm>
+          <a:prstGeom prst="rect">
+            <a:avLst/>
+          </a:prstGeom>
+          <a:noFill/>
+        </p:spPr>
+        <p:txBody>
+          <a:bodyPr wrap="none">
+            <a:spAutoFit/>
+          </a:bodyPr>
+          <a:lstStyle/>
+          <a:p>
+            <a:pPr algn="ctr"/>
+            <a:r>
+              <a:rPr sz="1200" i="1">
+                <a:solidFill>
+                  <a:srgbClr val="555555"/>
+                </a:solidFill>
+              </a:rPr>
+              <a:t>Recoverability R per scheme (red = broken, green = resists); chosen plaintexts at 512x512.</a:t>
             </a:r>
           </a:p>
         </p:txBody>
@@ -3197,7 +3256,7 @@
                   <a:srgbClr val="1F3355"/>
                 </a:solidFill>
               </a:rPr>
-              <a:t>Conclusions, remedies, and disclosure</a:t>
+              <a:t>Discussion: good statistics are not security</a:t>
             </a:r>
           </a:p>
         </p:txBody>
@@ -3235,7 +3294,7 @@
                   <a:srgbClr val="1F3355"/>
                 </a:solidFill>
               </a:rPr>
-              <a:t>LLEO is completely broken by an equivalent-key chosen-plaintext attack in 4 queries and a fraction of a second, despite near-ideal statistics.</a:t>
+              <a:t>A flat histogram, ideal entropy, near-zero correlation, and a large inter-image NPCR all hold for our fixed, key-only map -- yet it is broken in 4 queries.</a:t>
             </a:r>
           </a:p>
           <a:p>
@@ -3250,7 +3309,7 @@
                   <a:srgbClr val="1F3355"/>
                 </a:solidFill>
               </a:rPr>
-              <a:t>Remedies (standard): (i) tie the keystream to the image — e.g., seed the chaos from a SHA-256 hash (a fixed-size fingerprint of the image); (ii) add real diffusion, e.g., a chaining rule so each output pixel also depends on the previous one.</a:t>
+              <a:t>The single deciding question is binary: does any key material depend on the image? The oracle answers it automatically for any scheme.</a:t>
             </a:r>
           </a:p>
           <a:p>
@@ -3265,7 +3324,7 @@
                   <a:srgbClr val="1F3355"/>
                 </a:solidFill>
               </a:rPr>
-              <a:t>Sanity check: the identical attack recovers 100% of pixels against the original key-only cipher, but only 0.25% (no better than guessing) once the keystream is seeded from the image's hash.</a:t>
+              <a:t>The break is sound by construction: LLEO forces its multipliers odd (always invertible), and the equivalent key predicts fresh ciphertexts exactly -- the falsifiable check that the cipher truly ignores the image.</a:t>
             </a:r>
           </a:p>
           <a:p>
@@ -3280,7 +3339,7 @@
                   <a:srgbClr val="1F3355"/>
                 </a:solidFill>
               </a:rPr>
-              <a:t>Statistical scores should support — not replace — an explicit chosen-plaintext security argument. The authors will be notified before camera-ready (responsible disclosure).</a:t>
+              <a:t>(The scheme's 'asymmetric' label is also a misnomer -- same keys encrypt and decrypt -- but that is cosmetic.)</a:t>
             </a:r>
           </a:p>
         </p:txBody>
@@ -3324,7 +3383,7 @@
                   <a:srgbClr val="1F3355"/>
                 </a:solidFill>
               </a:rPr>
-              <a:t>Appendix: the attack is not specific to LLEO</a:t>
+              <a:t>Conclusions, remedies, and disclosure</a:t>
             </a:r>
           </a:p>
         </p:txBody>
@@ -3362,7 +3421,7 @@
                   <a:srgbClr val="1F3355"/>
                 </a:solidFill>
               </a:rPr>
-              <a:t>A second, very different cipher family (an XOR-and-chain design, like CBC) also reduces to one simple fixed equation; we recover it exactly in 3 chosen plaintexts at 128×128.</a:t>
+              <a:t>LLEO is completely broken by an equivalent-key chosen-plaintext attack in 4 queries and a fraction of a second, despite near-ideal statistics.</a:t>
             </a:r>
           </a:p>
           <a:p>
@@ -3377,7 +3436,7 @@
                   <a:srgbClr val="1F3355"/>
                 </a:solidFill>
               </a:rPr>
-              <a:t>Cost grows only logarithmically — i.e. barely — with image size: 3 chosen plaintexts at 128^2/256^2, 4 at 512^2/1024^2, each under 0.3 s.</a:t>
+              <a:t>More than one break: the structural oracle flags every key-only scheme in a corpus and clears the image-bound ones -- an automated test for the flaw.</a:t>
             </a:r>
           </a:p>
           <a:p>
@@ -3392,7 +3451,22 @@
                   <a:srgbClr val="1F3355"/>
                 </a:solidFill>
               </a:rPr>
-              <a:t>The same procedure fails once the keystream is tied to a hash of the image — confirming that what matters is image-dependence, not the algebra or the number of rounds.</a:t>
+              <a:t>Remedies (standard): (i) tie the keystream to the image (seed the chaos from a SHA-256 hash of the image); (ii) add real diffusion (a chaining rule). The identical attack then recovers 100% of pixels against the key-only cipher but only 0.25% (chance) once the keystream is image-seeded.</a:t>
+            </a:r>
+          </a:p>
+          <a:p>
+            <a:pPr>
+              <a:spcAft>
+                <a:spcPts val="400"/>
+              </a:spcAft>
+            </a:pPr>
+            <a:r>
+              <a:rPr sz="1800">
+                <a:solidFill>
+                  <a:srgbClr val="1F3355"/>
+                </a:solidFill>
+              </a:rPr>
+              <a:t>Statistical scores should support -- not replace -- an explicit chosen-plaintext argument. Authors notified before camera-ready (responsible disclosure).</a:t>
             </a:r>
           </a:p>
         </p:txBody>
@@ -3436,7 +3510,7 @@
                   <a:srgbClr val="1F3355"/>
                 </a:solidFill>
               </a:rPr>
-              <a:t>Selected references</a:t>
+              <a:t>Appendix: why the break is sound (invertibility &amp; fidelity)</a:t>
             </a:r>
           </a:p>
         </p:txBody>
@@ -3474,7 +3548,7 @@
                   <a:srgbClr val="1F3355"/>
                 </a:solidFill>
               </a:rPr>
-              <a:t>J. Jain et al., “… image encryption …,” Optik 327:172304, 2025  (target scheme).</a:t>
+              <a:t>Odd multipliers: LLEO inverts its substitution by a modular conjugate, which forces every multiplier odd (always invertible mod 256). On the reconstruction all are odd and E(0)=0 holds exactly; if even multipliers were allowed the oracle degrades gracefully (about half the positions recovered) rather than returning a wrong inverse.</a:t>
             </a:r>
           </a:p>
           <a:p>
@@ -3489,7 +3563,7 @@
                   <a:srgbClr val="1F3355"/>
                 </a:solidFill>
               </a:rPr>
-              <a:t>C. Li et al., “When an attacker meets a cipher-image …,” survey of chaos-cipher breaks, 2019.</a:t>
+              <a:t>Fidelity: matching entropy/correlation proves nothing -- the load-bearing check is that the recovered key predicts fresh ciphertexts exactly, which only a plaintext-independent cipher can.</a:t>
             </a:r>
           </a:p>
           <a:p>
@@ -3504,37 +3578,7 @@
                   <a:srgbClr val="1F3355"/>
                 </a:solidFill>
               </a:rPr>
-              <a:t>G. Alvarez and S. Li, “Some basic cryptographic requirements for chaos-based cryptosystems,” 2006.</a:t>
-            </a:r>
-          </a:p>
-          <a:p>
-            <a:pPr>
-              <a:spcAft>
-                <a:spcPts val="400"/>
-              </a:spcAft>
-            </a:pPr>
-            <a:r>
-              <a:rPr sz="1800">
-                <a:solidFill>
-                  <a:srgbClr val="1F3355"/>
-                </a:solidFill>
-              </a:rPr>
-              <a:t>C.-Y. Li and C.-C. Lo, optimal known/chosen-plaintext bound for permutation-only ciphers, 2011.</a:t>
-            </a:r>
-          </a:p>
-          <a:p>
-            <a:pPr>
-              <a:spcAft>
-                <a:spcPts val="400"/>
-              </a:spcAft>
-            </a:pPr>
-            <a:r>
-              <a:rPr sz="1800">
-                <a:solidFill>
-                  <a:srgbClr val="1F3355"/>
-                </a:solidFill>
-              </a:rPr>
-              <a:t>Y. Wu et al., NPCR and UACI randomness tests for image encryption, 2011.</a:t>
+              <a:t>Generality &amp; scale: a very different XOR-and-chain (CBC-like) cipher also falls in 3-4 chosen plaintexts; cost grows only logarithmically with image size (3-4 plaintexts up to 1024x1024).</a:t>
             </a:r>
           </a:p>
         </p:txBody>
@@ -3548,6 +3592,148 @@
 </file>
 
 <file path=ppt/slides/slide15.xml><?xml version="1.0" encoding="utf-8"?>
+<p:sld xmlns:a="http://schemas.openxmlformats.org/drawingml/2006/main" xmlns:p="http://schemas.openxmlformats.org/presentationml/2006/main" xmlns:r="http://schemas.openxmlformats.org/officeDocument/2006/relationships">
+  <p:cSld>
+    <p:spTree>
+      <p:nvGrpSpPr>
+        <p:cNvPr id="1" name=""/>
+        <p:cNvGrpSpPr/>
+        <p:nvPr/>
+      </p:nvGrpSpPr>
+      <p:grpSpPr/>
+      <p:sp>
+        <p:nvSpPr>
+          <p:cNvPr id="2" name="Title 1"/>
+          <p:cNvSpPr>
+            <a:spLocks noGrp="1"/>
+          </p:cNvSpPr>
+          <p:nvPr>
+            <p:ph type="title"/>
+          </p:nvPr>
+        </p:nvSpPr>
+        <p:spPr/>
+        <p:txBody>
+          <a:bodyPr/>
+          <a:lstStyle/>
+          <a:p>
+            <a:r>
+              <a:rPr sz="3000" b="1">
+                <a:solidFill>
+                  <a:srgbClr val="1F3355"/>
+                </a:solidFill>
+              </a:rPr>
+              <a:t>Selected references</a:t>
+            </a:r>
+          </a:p>
+        </p:txBody>
+      </p:sp>
+      <p:sp>
+        <p:nvSpPr>
+          <p:cNvPr id="3" name="Content Placeholder 2"/>
+          <p:cNvSpPr>
+            <a:spLocks noGrp="1"/>
+          </p:cNvSpPr>
+          <p:nvPr>
+            <p:ph idx="1"/>
+          </p:nvPr>
+        </p:nvSpPr>
+        <p:spPr>
+          <a:xfrm>
+            <a:off x="640080" y="1783080"/>
+            <a:ext cx="10927080" cy="4114800"/>
+          </a:xfrm>
+        </p:spPr>
+        <p:txBody>
+          <a:bodyPr wrap="square">
+            <a:normAutofit/>
+          </a:bodyPr>
+          <a:lstStyle/>
+          <a:p>
+            <a:pPr>
+              <a:spcAft>
+                <a:spcPts val="400"/>
+              </a:spcAft>
+            </a:pPr>
+            <a:r>
+              <a:rPr sz="1800">
+                <a:solidFill>
+                  <a:srgbClr val="1F3355"/>
+                </a:solidFill>
+              </a:rPr>
+              <a:t>J. Jain et al., “… image encryption …,” Optik 327:172304, 2025  (target scheme).</a:t>
+            </a:r>
+          </a:p>
+          <a:p>
+            <a:pPr>
+              <a:spcAft>
+                <a:spcPts val="400"/>
+              </a:spcAft>
+            </a:pPr>
+            <a:r>
+              <a:rPr sz="1800">
+                <a:solidFill>
+                  <a:srgbClr val="1F3355"/>
+                </a:solidFill>
+              </a:rPr>
+              <a:t>C. Li et al., “When an attacker meets a cipher-image …,” survey of chaos-cipher breaks, 2019.</a:t>
+            </a:r>
+          </a:p>
+          <a:p>
+            <a:pPr>
+              <a:spcAft>
+                <a:spcPts val="400"/>
+              </a:spcAft>
+            </a:pPr>
+            <a:r>
+              <a:rPr sz="1800">
+                <a:solidFill>
+                  <a:srgbClr val="1F3355"/>
+                </a:solidFill>
+              </a:rPr>
+              <a:t>G. Alvarez and S. Li, “Some basic cryptographic requirements for chaos-based cryptosystems,” 2006.</a:t>
+            </a:r>
+          </a:p>
+          <a:p>
+            <a:pPr>
+              <a:spcAft>
+                <a:spcPts val="400"/>
+              </a:spcAft>
+            </a:pPr>
+            <a:r>
+              <a:rPr sz="1800">
+                <a:solidFill>
+                  <a:srgbClr val="1F3355"/>
+                </a:solidFill>
+              </a:rPr>
+              <a:t>C.-Y. Li and C.-C. Lo, optimal known/chosen-plaintext bound for permutation-only ciphers, 2011.</a:t>
+            </a:r>
+          </a:p>
+          <a:p>
+            <a:pPr>
+              <a:spcAft>
+                <a:spcPts val="400"/>
+              </a:spcAft>
+            </a:pPr>
+            <a:r>
+              <a:rPr sz="1800">
+                <a:solidFill>
+                  <a:srgbClr val="1F3355"/>
+                </a:solidFill>
+              </a:rPr>
+              <a:t>Y. Wu et al., NPCR and UACI randomness tests for image encryption, 2011.</a:t>
+            </a:r>
+          </a:p>
+        </p:txBody>
+      </p:sp>
+    </p:spTree>
+  </p:cSld>
+  <p:clrMapOvr>
+    <a:masterClrMapping/>
+  </p:clrMapOvr>
+</p:sld>
+</file>
+
+<file path=ppt/slides/slide16.xml><?xml version="1.0" encoding="utf-8"?>
 <p:sld xmlns:a="http://schemas.openxmlformats.org/drawingml/2006/main" xmlns:p="http://schemas.openxmlformats.org/presentationml/2006/main" xmlns:r="http://schemas.openxmlformats.org/officeDocument/2006/relationships">
   <p:cSld>
     <p:spTree>

--- a/papers/paper1-chaos-cpa/presentation.pptx
+++ b/papers/paper1-chaos-cpa/presentation.pptx
@@ -24,6 +24,7 @@
     <p:sldId id="269" r:id="rId20"/>
     <p:sldId id="270" r:id="rId21"/>
     <p:sldId id="271" r:id="rId22"/>
+    <p:sldId id="272" r:id="rId23"/>
   </p:sldIdLst>
   <p:sldSz cx="12192000" cy="6858000"/>
   <p:notesSz cx="6858000" cy="9144000"/>
@@ -3086,7 +3087,7 @@
                   <a:srgbClr val="1F3355"/>
                 </a:solidFill>
               </a:rPr>
-              <a:t>The contribution: a structural oracle that retires the genre</a:t>
+              <a:t>The contribution: a reusable structural audit</a:t>
             </a:r>
           </a:p>
         </p:txBody>
@@ -3148,7 +3149,7 @@
                   <a:srgbClr val="1F3355"/>
                 </a:solidFill>
               </a:rPr>
-              <a:t>We package the attack as a black-box test: given only the ability to encrypt chosen images, it decides whether a cipher is one fixed plaintext-independent map and, if so, recovers an equivalent key -- knowing nothing about the scheme inside.</a:t>
+              <a:t>We package the attack as a black-box test: given only the ability to encrypt chosen images, it decides whether a cipher is one fixed plaintext-independent map and, if so, recovers an equivalent key -- knowing nothing about the scheme inside, and CERTIFYING each verdict by predicting fresh ciphertext exactly (a check we prove sound).</a:t>
             </a:r>
           </a:p>
           <a:p>
@@ -3163,7 +3164,7 @@
                   <a:srgbClr val="1F3355"/>
                 </a:solidFill>
               </a:rPr>
-              <a:t>Across 8 schemes it breaks all 5 key-only ones at R = 1 in &lt;= 5 chosen plaintexts: chaos, permutation, additive, affine, and even a modern AES-CTR key stream -- the chaos was never the point; a reused, image-independent keystream is.</a:t>
+              <a:t>On 8 structural archetypes it breaks all 5 fully key-only ones at R = 1 in &lt;= 5 chosen plaintexts (chaos, permutation, additive, affine, even a modern AES-CTR key stream); 2 image-/nonce-bound schemes correctly resist; a 6th, with non-invertible multipliers, degrades GRACEFULLY (R = 0.52, PARTIAL) -- the deliberate boundary.</a:t>
             </a:r>
           </a:p>
           <a:p>
@@ -3178,7 +3179,7 @@
                   <a:srgbClr val="1F3355"/>
                 </a:solidFill>
               </a:rPr>
-              <a:t>It correctly declines the 2 defended schemes that tie the keystream to the image (SHA-256) or a per-image nonce -- so the test retires the whole genre, not one paper.</a:t>
+              <a:t>The chaos was never the point -- a reused, image-independent keystream is. This is a reusable audit, not a one-paper break.</a:t>
             </a:r>
           </a:p>
         </p:txBody>
@@ -3212,7 +3213,7 @@
                   <a:srgbClr val="555555"/>
                 </a:solidFill>
               </a:rPr>
-              <a:t>Recoverability R per scheme (red = broken, green = resists); chosen plaintexts at 512x512.</a:t>
+              <a:t>Recoverability R per scheme on an archetype corpus (red = broken, green = resists); chosen plaintexts at 512x512.</a:t>
             </a:r>
           </a:p>
         </p:txBody>
@@ -3256,26 +3257,50 @@
                   <a:srgbClr val="1F3355"/>
                 </a:solidFill>
               </a:rPr>
-              <a:t>Discussion: good statistics are not security</a:t>
-            </a:r>
-          </a:p>
-        </p:txBody>
-      </p:sp>
-      <p:sp>
-        <p:nvSpPr>
-          <p:cNvPr id="3" name="Content Placeholder 2"/>
-          <p:cNvSpPr>
-            <a:spLocks noGrp="1"/>
-          </p:cNvSpPr>
-          <p:nvPr>
-            <p:ph idx="1"/>
-          </p:nvPr>
-        </p:nvSpPr>
-        <p:spPr>
-          <a:xfrm>
-            <a:off x="640080" y="1783080"/>
-            <a:ext cx="10927080" cy="4114800"/>
-          </a:xfrm>
+              <a:t>Run on four real published 2023–2025 ciphers</a:t>
+            </a:r>
+          </a:p>
+        </p:txBody>
+      </p:sp>
+      <p:pic>
+        <p:nvPicPr>
+          <p:cNvPr id="3" name="Picture 2" descr="p1_published_audit.png"/>
+          <p:cNvPicPr>
+            <a:picLocks noChangeAspect="1"/>
+          </p:cNvPicPr>
+          <p:nvPr/>
+        </p:nvPicPr>
+        <p:blipFill>
+          <a:blip r:embed="rId2"/>
+          <a:stretch>
+            <a:fillRect/>
+          </a:stretch>
+        </p:blipFill>
+        <p:spPr>
+          <a:xfrm>
+            <a:off x="1338282" y="1463040"/>
+            <a:ext cx="5095836" cy="4050792"/>
+          </a:xfrm>
+          <a:prstGeom prst="rect">
+            <a:avLst/>
+          </a:prstGeom>
+        </p:spPr>
+      </p:pic>
+      <p:sp>
+        <p:nvSpPr>
+          <p:cNvPr id="4" name="TextBox 3"/>
+          <p:cNvSpPr txBox="1"/>
+          <p:nvPr/>
+        </p:nvSpPr>
+        <p:spPr>
+          <a:xfrm>
+            <a:off x="7498080" y="1600200"/>
+            <a:ext cx="4663440" cy="4206240"/>
+          </a:xfrm>
+          <a:prstGeom prst="rect">
+            <a:avLst/>
+          </a:prstGeom>
+          <a:noFill/>
         </p:spPr>
         <p:txBody>
           <a:bodyPr wrap="square">
@@ -3283,63 +3308,82 @@
           </a:bodyPr>
           <a:lstStyle/>
           <a:p>
-            <a:pPr>
+            <a:pPr algn="l">
               <a:spcAft>
                 <a:spcPts val="400"/>
               </a:spcAft>
             </a:pPr>
             <a:r>
-              <a:rPr sz="1800">
-                <a:solidFill>
-                  <a:srgbClr val="1F3355"/>
-                </a:solidFill>
-              </a:rPr>
-              <a:t>A flat histogram, ideal entropy, near-zero correlation, and a large inter-image NPCR all hold for our fixed, key-only map -- yet it is broken in 4 queries.</a:t>
-            </a:r>
-          </a:p>
-          <a:p>
-            <a:pPr>
+              <a:rPr sz="1600">
+                <a:solidFill>
+                  <a:srgbClr val="1F3355"/>
+                </a:solidFill>
+              </a:rPr>
+              <a:t>We reconstructed four real, open-access chaos image ciphers from their equations and ran the audit. Each reproduces the originals' near-ideal entropy (~7.99) and inter-image NPCR (~99.6%) -- so the rebuilds behave like the published ciphers where it counts.</a:t>
+            </a:r>
+          </a:p>
+          <a:p>
+            <a:pPr algn="l">
               <a:spcAft>
                 <a:spcPts val="400"/>
               </a:spcAft>
             </a:pPr>
             <a:r>
-              <a:rPr sz="1800">
-                <a:solidFill>
-                  <a:srgbClr val="1F3355"/>
-                </a:solidFill>
-              </a:rPr>
-              <a:t>The single deciding question is binary: does any key material depend on the image? The oracle answers it automatically for any scheme.</a:t>
-            </a:r>
-          </a:p>
-          <a:p>
-            <a:pPr>
+              <a:rPr sz="1600">
+                <a:solidFill>
+                  <a:srgbClr val="1F3355"/>
+                </a:solidFill>
+              </a:rPr>
+              <a:t>Seeding decides the verdict. LSCM-CA (Sun et al. 2025) is key-only -&gt; BROKEN (R = 1.0, 12 chosen plaintexts) -- but only after a GF(2)-affine 'bitlinear' extension to peel its per-pixel cellular-automata layer, which the plain affine/XOR model misses. The other three bind the keystream to the plaintext (SHA-256 / block sum) -&gt; correctly RESIST.</a:t>
+            </a:r>
+          </a:p>
+          <a:p>
+            <a:pPr algn="l">
               <a:spcAft>
                 <a:spcPts val="400"/>
               </a:spcAft>
             </a:pPr>
             <a:r>
-              <a:rPr sz="1800">
-                <a:solidFill>
-                  <a:srgbClr val="1F3355"/>
-                </a:solidFill>
-              </a:rPr>
-              <a:t>The break is sound by construction: LLEO forces its multipliers odd (always invertible), and the equivalent key predicts fresh ciphertexts exactly -- the falsifiable check that the cipher truly ignores the image.</a:t>
-            </a:r>
-          </a:p>
-          <a:p>
-            <a:pPr>
-              <a:spcAft>
-                <a:spcPts val="400"/>
-              </a:spcAft>
-            </a:pPr>
-            <a:r>
-              <a:rPr sz="1800">
-                <a:solidFill>
-                  <a:srgbClr val="1F3355"/>
-                </a:solidFill>
-              </a:rPr>
-              <a:t>(The scheme's 'asymmetric' label is also a misnomer -- same keys encrypt and decrypt -- but that is cosmetic.)</a:t>
+              <a:rPr sz="1600">
+                <a:solidFill>
+                  <a:srgbClr val="1F3355"/>
+                </a:solidFill>
+              </a:rPr>
+              <a:t>Honest limits: two 'resists' are thin (one injects only a 256-way scalar; one collapses if a 64-pixel seed block is fixed), and the two cheap signals cannot tell genuine binding from a near-miss -- we mark this, not hide it. Reconstructions are paper-only; LLEO is the one fully-validated break.</a:t>
+            </a:r>
+          </a:p>
+        </p:txBody>
+      </p:sp>
+      <p:sp>
+        <p:nvSpPr>
+          <p:cNvPr id="5" name="TextBox 4"/>
+          <p:cNvSpPr txBox="1"/>
+          <p:nvPr/>
+        </p:nvSpPr>
+        <p:spPr>
+          <a:xfrm>
+            <a:off x="320040" y="5513832"/>
+            <a:ext cx="7132320" cy="365760"/>
+          </a:xfrm>
+          <a:prstGeom prst="rect">
+            <a:avLst/>
+          </a:prstGeom>
+          <a:noFill/>
+        </p:spPr>
+        <p:txBody>
+          <a:bodyPr wrap="none">
+            <a:spAutoFit/>
+          </a:bodyPr>
+          <a:lstStyle/>
+          <a:p>
+            <a:pPr algn="ctr"/>
+            <a:r>
+              <a:rPr sz="1200" i="1">
+                <a:solidFill>
+                  <a:srgbClr val="555555"/>
+                </a:solidFill>
+              </a:rPr>
+              <a:t>The audit in its two signals (avalanche vs. recoverability) on real schemes rebuilt from their papers.</a:t>
             </a:r>
           </a:p>
         </p:txBody>
@@ -3383,7 +3427,7 @@
                   <a:srgbClr val="1F3355"/>
                 </a:solidFill>
               </a:rPr>
-              <a:t>Conclusions, remedies, and disclosure</a:t>
+              <a:t>Discussion: good statistics are not security</a:t>
             </a:r>
           </a:p>
         </p:txBody>
@@ -3421,7 +3465,7 @@
                   <a:srgbClr val="1F3355"/>
                 </a:solidFill>
               </a:rPr>
-              <a:t>LLEO is completely broken by an equivalent-key chosen-plaintext attack in 4 queries and a fraction of a second, despite near-ideal statistics.</a:t>
+              <a:t>A flat histogram, ideal entropy, near-zero correlation, and a large inter-image NPCR all hold for our fixed, key-only map -- yet it is broken in 4 queries.</a:t>
             </a:r>
           </a:p>
           <a:p>
@@ -3436,7 +3480,7 @@
                   <a:srgbClr val="1F3355"/>
                 </a:solidFill>
               </a:rPr>
-              <a:t>More than one break: the structural oracle flags every key-only scheme in a corpus and clears the image-bound ones -- an automated test for the flaw.</a:t>
+              <a:t>The single deciding question is binary: does any key material depend on the image? The oracle answers it automatically for any scheme.</a:t>
             </a:r>
           </a:p>
           <a:p>
@@ -3451,7 +3495,7 @@
                   <a:srgbClr val="1F3355"/>
                 </a:solidFill>
               </a:rPr>
-              <a:t>Remedies (standard): (i) tie the keystream to the image (seed the chaos from a SHA-256 hash of the image); (ii) add real diffusion (a chaining rule). The identical attack then recovers 100% of pixels against the key-only cipher but only 0.25% (chance) once the keystream is image-seeded.</a:t>
+              <a:t>The break is sound by construction: LLEO forces its multipliers odd (always invertible), and the equivalent key predicts fresh ciphertexts exactly -- the falsifiable check that the cipher truly ignores the image.</a:t>
             </a:r>
           </a:p>
           <a:p>
@@ -3466,7 +3510,7 @@
                   <a:srgbClr val="1F3355"/>
                 </a:solidFill>
               </a:rPr>
-              <a:t>Statistical scores should support -- not replace -- an explicit chosen-plaintext argument. Authors notified before camera-ready (responsible disclosure).</a:t>
+              <a:t>(The scheme's 'asymmetric' label is also a misnomer -- same keys encrypt and decrypt -- but that is cosmetic.)</a:t>
             </a:r>
           </a:p>
         </p:txBody>
@@ -3510,7 +3554,7 @@
                   <a:srgbClr val="1F3355"/>
                 </a:solidFill>
               </a:rPr>
-              <a:t>Appendix: why the break is sound (invertibility &amp; fidelity)</a:t>
+              <a:t>Conclusions, remedies, and disclosure</a:t>
             </a:r>
           </a:p>
         </p:txBody>
@@ -3548,7 +3592,7 @@
                   <a:srgbClr val="1F3355"/>
                 </a:solidFill>
               </a:rPr>
-              <a:t>Odd multipliers: LLEO inverts its substitution by a modular conjugate, which forces every multiplier odd (always invertible mod 256). On the reconstruction all are odd and E(0)=0 holds exactly; if even multipliers were allowed the oracle degrades gracefully (about half the positions recovered) rather than returning a wrong inverse.</a:t>
+              <a:t>LLEO is completely broken by an equivalent-key chosen-plaintext attack in 4 queries and a fraction of a second, despite near-ideal statistics.</a:t>
             </a:r>
           </a:p>
           <a:p>
@@ -3563,7 +3607,7 @@
                   <a:srgbClr val="1F3355"/>
                 </a:solidFill>
               </a:rPr>
-              <a:t>Fidelity: matching entropy/correlation proves nothing -- the load-bearing check is that the recovered key predicts fresh ciphertexts exactly, which only a plaintext-independent cipher can.</a:t>
+              <a:t>More than one break: the audit flags every fully key-only scheme in an 8-archetype corpus and, on four real published 2023-2025 ciphers, breaks the one key-only design (LSCM-CA) and clears three plaintext-bound ones -- one break needing a GF(2)-affine extension.</a:t>
             </a:r>
           </a:p>
           <a:p>
@@ -3578,7 +3622,22 @@
                   <a:srgbClr val="1F3355"/>
                 </a:solidFill>
               </a:rPr>
-              <a:t>Generality &amp; scale: a very different XOR-and-chain (CBC-like) cipher also falls in 3-4 chosen plaintexts; cost grows only logarithmically with image size (3-4 plaintexts up to 1024x1024).</a:t>
+              <a:t>Remedies (standard): (i) tie the keystream to the image (seed the chaos from a SHA-256 hash of the image); (ii) add real diffusion (a chaining rule). The identical attack then recovers 100% of pixels against the key-only cipher but only 0.25% (chance) once the keystream is image-seeded.</a:t>
+            </a:r>
+          </a:p>
+          <a:p>
+            <a:pPr>
+              <a:spcAft>
+                <a:spcPts val="400"/>
+              </a:spcAft>
+            </a:pPr>
+            <a:r>
+              <a:rPr sz="1800">
+                <a:solidFill>
+                  <a:srgbClr val="1F3355"/>
+                </a:solidFill>
+              </a:rPr>
+              <a:t>Statistical scores should support -- not replace -- an explicit chosen-plaintext argument. Authors of both broken schemes (LLEO and LSCM-CA) notified before camera-ready (responsible disclosure).</a:t>
             </a:r>
           </a:p>
         </p:txBody>
@@ -3622,7 +3681,7 @@
                   <a:srgbClr val="1F3355"/>
                 </a:solidFill>
               </a:rPr>
-              <a:t>Selected references</a:t>
+              <a:t>Appendix: why the break is sound (invertibility &amp; fidelity)</a:t>
             </a:r>
           </a:p>
         </p:txBody>
@@ -3660,7 +3719,7 @@
                   <a:srgbClr val="1F3355"/>
                 </a:solidFill>
               </a:rPr>
-              <a:t>J. Jain et al., “… image encryption …,” Optik 327:172304, 2025  (target scheme).</a:t>
+              <a:t>Odd multipliers: LLEO inverts its substitution by a modular conjugate, which forces every multiplier odd (always invertible mod 256). On the reconstruction all are odd and E(0)=0 holds exactly; if even multipliers were allowed the oracle degrades gracefully (about half the positions recovered) rather than returning a wrong inverse.</a:t>
             </a:r>
           </a:p>
           <a:p>
@@ -3675,7 +3734,7 @@
                   <a:srgbClr val="1F3355"/>
                 </a:solidFill>
               </a:rPr>
-              <a:t>C. Li et al., “When an attacker meets a cipher-image …,” survey of chaos-cipher breaks, 2019.</a:t>
+              <a:t>Fidelity: matching entropy/correlation proves nothing -- the load-bearing check is that the recovered key predicts fresh ciphertexts exactly, which only a plaintext-independent cipher can.</a:t>
             </a:r>
           </a:p>
           <a:p>
@@ -3690,37 +3749,7 @@
                   <a:srgbClr val="1F3355"/>
                 </a:solidFill>
               </a:rPr>
-              <a:t>G. Alvarez and S. Li, “Some basic cryptographic requirements for chaos-based cryptosystems,” 2006.</a:t>
-            </a:r>
-          </a:p>
-          <a:p>
-            <a:pPr>
-              <a:spcAft>
-                <a:spcPts val="400"/>
-              </a:spcAft>
-            </a:pPr>
-            <a:r>
-              <a:rPr sz="1800">
-                <a:solidFill>
-                  <a:srgbClr val="1F3355"/>
-                </a:solidFill>
-              </a:rPr>
-              <a:t>C.-Y. Li and C.-C. Lo, optimal known/chosen-plaintext bound for permutation-only ciphers, 2011.</a:t>
-            </a:r>
-          </a:p>
-          <a:p>
-            <a:pPr>
-              <a:spcAft>
-                <a:spcPts val="400"/>
-              </a:spcAft>
-            </a:pPr>
-            <a:r>
-              <a:rPr sz="1800">
-                <a:solidFill>
-                  <a:srgbClr val="1F3355"/>
-                </a:solidFill>
-              </a:rPr>
-              <a:t>Y. Wu et al., NPCR and UACI randomness tests for image encryption, 2011.</a:t>
+              <a:t>Generality &amp; scale: a very different XOR-and-chain (CBC-like) cipher also falls in 3-4 chosen plaintexts; cost grows only logarithmically with image size (3-4 plaintexts up to 1024x1024).</a:t>
             </a:r>
           </a:p>
         </p:txBody>
@@ -3734,6 +3763,148 @@
 </file>
 
 <file path=ppt/slides/slide16.xml><?xml version="1.0" encoding="utf-8"?>
+<p:sld xmlns:a="http://schemas.openxmlformats.org/drawingml/2006/main" xmlns:p="http://schemas.openxmlformats.org/presentationml/2006/main" xmlns:r="http://schemas.openxmlformats.org/officeDocument/2006/relationships">
+  <p:cSld>
+    <p:spTree>
+      <p:nvGrpSpPr>
+        <p:cNvPr id="1" name=""/>
+        <p:cNvGrpSpPr/>
+        <p:nvPr/>
+      </p:nvGrpSpPr>
+      <p:grpSpPr/>
+      <p:sp>
+        <p:nvSpPr>
+          <p:cNvPr id="2" name="Title 1"/>
+          <p:cNvSpPr>
+            <a:spLocks noGrp="1"/>
+          </p:cNvSpPr>
+          <p:nvPr>
+            <p:ph type="title"/>
+          </p:nvPr>
+        </p:nvSpPr>
+        <p:spPr/>
+        <p:txBody>
+          <a:bodyPr/>
+          <a:lstStyle/>
+          <a:p>
+            <a:r>
+              <a:rPr sz="3000" b="1">
+                <a:solidFill>
+                  <a:srgbClr val="1F3355"/>
+                </a:solidFill>
+              </a:rPr>
+              <a:t>Selected references</a:t>
+            </a:r>
+          </a:p>
+        </p:txBody>
+      </p:sp>
+      <p:sp>
+        <p:nvSpPr>
+          <p:cNvPr id="3" name="Content Placeholder 2"/>
+          <p:cNvSpPr>
+            <a:spLocks noGrp="1"/>
+          </p:cNvSpPr>
+          <p:nvPr>
+            <p:ph idx="1"/>
+          </p:nvPr>
+        </p:nvSpPr>
+        <p:spPr>
+          <a:xfrm>
+            <a:off x="640080" y="1783080"/>
+            <a:ext cx="10927080" cy="4114800"/>
+          </a:xfrm>
+        </p:spPr>
+        <p:txBody>
+          <a:bodyPr wrap="square">
+            <a:normAutofit/>
+          </a:bodyPr>
+          <a:lstStyle/>
+          <a:p>
+            <a:pPr>
+              <a:spcAft>
+                <a:spcPts val="400"/>
+              </a:spcAft>
+            </a:pPr>
+            <a:r>
+              <a:rPr sz="1800">
+                <a:solidFill>
+                  <a:srgbClr val="1F3355"/>
+                </a:solidFill>
+              </a:rPr>
+              <a:t>J. Jain et al., “… image encryption …,” Optik 327:172304, 2025  (target scheme).</a:t>
+            </a:r>
+          </a:p>
+          <a:p>
+            <a:pPr>
+              <a:spcAft>
+                <a:spcPts val="400"/>
+              </a:spcAft>
+            </a:pPr>
+            <a:r>
+              <a:rPr sz="1800">
+                <a:solidFill>
+                  <a:srgbClr val="1F3355"/>
+                </a:solidFill>
+              </a:rPr>
+              <a:t>C. Li et al., “When an attacker meets a cipher-image …,” survey of chaos-cipher breaks, 2019.</a:t>
+            </a:r>
+          </a:p>
+          <a:p>
+            <a:pPr>
+              <a:spcAft>
+                <a:spcPts val="400"/>
+              </a:spcAft>
+            </a:pPr>
+            <a:r>
+              <a:rPr sz="1800">
+                <a:solidFill>
+                  <a:srgbClr val="1F3355"/>
+                </a:solidFill>
+              </a:rPr>
+              <a:t>G. Alvarez and S. Li, “Some basic cryptographic requirements for chaos-based cryptosystems,” 2006.</a:t>
+            </a:r>
+          </a:p>
+          <a:p>
+            <a:pPr>
+              <a:spcAft>
+                <a:spcPts val="400"/>
+              </a:spcAft>
+            </a:pPr>
+            <a:r>
+              <a:rPr sz="1800">
+                <a:solidFill>
+                  <a:srgbClr val="1F3355"/>
+                </a:solidFill>
+              </a:rPr>
+              <a:t>C.-Y. Li and C.-C. Lo, optimal known/chosen-plaintext bound for permutation-only ciphers, 2011.</a:t>
+            </a:r>
+          </a:p>
+          <a:p>
+            <a:pPr>
+              <a:spcAft>
+                <a:spcPts val="400"/>
+              </a:spcAft>
+            </a:pPr>
+            <a:r>
+              <a:rPr sz="1800">
+                <a:solidFill>
+                  <a:srgbClr val="1F3355"/>
+                </a:solidFill>
+              </a:rPr>
+              <a:t>Y. Wu et al., NPCR and UACI randomness tests for image encryption, 2011.</a:t>
+            </a:r>
+          </a:p>
+        </p:txBody>
+      </p:sp>
+    </p:spTree>
+  </p:cSld>
+  <p:clrMapOvr>
+    <a:masterClrMapping/>
+  </p:clrMapOvr>
+</p:sld>
+</file>
+
+<file path=ppt/slides/slide17.xml><?xml version="1.0" encoding="utf-8"?>
 <p:sld xmlns:a="http://schemas.openxmlformats.org/drawingml/2006/main" xmlns:p="http://schemas.openxmlformats.org/presentationml/2006/main" xmlns:r="http://schemas.openxmlformats.org/officeDocument/2006/relationships">
   <p:cSld>
     <p:spTree>

--- a/papers/paper1-chaos-cpa/presentation.pptx
+++ b/papers/paper1-chaos-cpa/presentation.pptx
@@ -3637,7 +3637,7 @@
                   <a:srgbClr val="1F3355"/>
                 </a:solidFill>
               </a:rPr>
-              <a:t>Statistical scores should support -- not replace -- an explicit chosen-plaintext argument. Authors of both broken schemes (LLEO and LSCM-CA) notified before camera-ready (responsible disclosure).</a:t>
+              <a:t>Statistical scores should support -- not replace -- an explicit chosen-plaintext argument. Authors of both broken schemes (LLEO and LSCM-CA) notified at submission (responsible disclosure).</a:t>
             </a:r>
           </a:p>
         </p:txBody>

--- a/papers/paper1-chaos-cpa/presentation.pptx
+++ b/papers/paper1-chaos-cpa/presentation.pptx
@@ -3637,7 +3637,7 @@
                   <a:srgbClr val="1F3355"/>
                 </a:solidFill>
               </a:rPr>
-              <a:t>Statistical scores should support -- not replace -- an explicit chosen-plaintext argument. Authors of both broken schemes (LLEO and LSCM-CA) notified at submission (responsible disclosure).</a:t>
+              <a:t>Statistical scores should support -- not replace -- an explicit chosen-plaintext argument. Authors of both broken schemes (LLEO and LSCM-CA) emailed at submission; no response yet (responsible disclosure).</a:t>
             </a:r>
           </a:p>
         </p:txBody>

--- a/papers/paper1-chaos-cpa/presentation.pptx
+++ b/papers/paper1-chaos-cpa/presentation.pptx
@@ -4766,8 +4766,8 @@
         </p:blipFill>
         <p:spPr>
           <a:xfrm>
-            <a:off x="1829132" y="1463040"/>
-            <a:ext cx="5302854" cy="4050792"/>
+            <a:off x="1875150" y="1463040"/>
+            <a:ext cx="5210819" cy="4050792"/>
           </a:xfrm>
           <a:prstGeom prst="rect">
             <a:avLst/>

--- a/papers/paper1-chaos-cpa/presentation.pptx
+++ b/papers/paper1-chaos-cpa/presentation.pptx
@@ -2858,6 +2858,21 @@
                   <a:srgbClr val="1F3355"/>
                 </a:solidFill>
               </a:rPr>
+              <a:t>Good statistics are not security: a 2025 cipher broken in 4 chosen plaintexts</a:t>
+            </a:r>
+          </a:p>
+          <a:p>
+            <a:pPr algn="ctr">
+              <a:spcAft>
+                <a:spcPts val="400"/>
+              </a:spcAft>
+            </a:pPr>
+            <a:r>
+              <a:rPr sz="1800">
+                <a:solidFill>
+                  <a:srgbClr val="1F3355"/>
+                </a:solidFill>
+              </a:rPr>
               <a:t>UBMK’25 · International Conference on Computer Science and Engineering</a:t>
             </a:r>
           </a:p>
@@ -4476,7 +4491,7 @@
                   <a:srgbClr val="1F3355"/>
                 </a:solidFill>
               </a:rPr>
-              <a:t>Equivalent-key chosen-plaintext attack</a:t>
+              <a:t>Four images recover the full map</a:t>
             </a:r>
           </a:p>
         </p:txBody>

--- a/papers/paper1-chaos-cpa/presentation.pptx
+++ b/papers/paper1-chaos-cpa/presentation.pptx
@@ -4852,7 +4852,7 @@
                   <a:srgbClr val="1F3355"/>
                 </a:solidFill>
               </a:rPr>
-              <a:t>Decryption in a fraction of a second — no key used.</a:t>
+              <a:t>Decryption in 0.037 s at 512x512 (single core) — no key used.</a:t>
             </a:r>
           </a:p>
         </p:txBody>

--- a/papers/paper1-chaos-cpa/presentation.pptx
+++ b/papers/paper1-chaos-cpa/presentation.pptx
@@ -4121,6 +4121,21 @@
                 </a:solidFill>
               </a:rPr>
               <a:t>But none of those scores tests resistance to a chosen-plaintext attack.</a:t>
+            </a:r>
+          </a:p>
+          <a:p>
+            <a:pPr>
+              <a:spcAft>
+                <a:spcPts val="400"/>
+              </a:spcAft>
+            </a:pPr>
+            <a:r>
+              <a:rPr sz="1800">
+                <a:solidFill>
+                  <a:srgbClr val="1F3355"/>
+                </a:solidFill>
+              </a:rPr>
+              <a:t>Why this matters operationally: image ciphers protect real data — medical scans, sealed evidence, access-controlled documents. A break is not a per-image slip but a standing ability to decrypt every future ciphertext of that size, so security must rest on an attack model, not a statistics table.</a:t>
             </a:r>
           </a:p>
           <a:p>

--- a/papers/paper1-chaos-cpa/presentation.pptx
+++ b/papers/paper1-chaos-cpa/presentation.pptx
@@ -3164,7 +3164,7 @@
                   <a:srgbClr val="1F3355"/>
                 </a:solidFill>
               </a:rPr>
-              <a:t>We package the attack as a black-box test: given only the ability to encrypt chosen images, it decides whether a cipher is one fixed plaintext-independent map and, if so, recovers an equivalent key -- knowing nothing about the scheme inside, and CERTIFYING each verdict by predicting fresh ciphertext exactly (a check we prove sound).</a:t>
+              <a:t>We package the attack as a black-box test: given only the ability to encrypt chosen images, it decides whether a cipher is one fixed plaintext-independent map and, if so, recovers an equivalent key, knowing nothing about the scheme inside, and CERTIFYING each verdict by predicting fresh ciphertext exactly (a check we prove sound).</a:t>
             </a:r>
           </a:p>
           <a:p>
@@ -3179,7 +3179,7 @@
                   <a:srgbClr val="1F3355"/>
                 </a:solidFill>
               </a:rPr>
-              <a:t>On 8 structural archetypes it breaks all 5 fully key-only ones at R = 1 in &lt;= 5 chosen plaintexts (chaos, permutation, additive, affine, even a modern AES-CTR key stream); 2 image-/nonce-bound schemes correctly resist; a 6th, with non-invertible multipliers, degrades GRACEFULLY (R = 0.52, PARTIAL) -- the deliberate boundary.</a:t>
+              <a:t>On 8 structural archetypes it breaks all 5 fully key-only ones at R = 1 in &lt;= 5 chosen plaintexts (chaos, permutation, additive, affine, even a modern AES-CTR key stream); 2 image-/nonce-bound schemes correctly resist; a 6th, with non-invertible multipliers, degrades GRACEFULLY (R = 0.52, PARTIAL), the deliberate boundary.</a:t>
             </a:r>
           </a:p>
           <a:p>
@@ -3194,7 +3194,7 @@
                   <a:srgbClr val="1F3355"/>
                 </a:solidFill>
               </a:rPr>
-              <a:t>The chaos was never the point -- a reused, image-independent keystream is. This is a reusable audit, not a one-paper break.</a:t>
+              <a:t>The chaos was never the point: a reused, image-independent keystream is. This is a reusable audit, not a one-paper break.</a:t>
             </a:r>
           </a:p>
         </p:txBody>
@@ -3334,7 +3334,7 @@
                   <a:srgbClr val="1F3355"/>
                 </a:solidFill>
               </a:rPr>
-              <a:t>We reconstructed four real, open-access chaos image ciphers from their equations and ran the audit. Each reproduces the originals' near-ideal entropy (~7.99) and inter-image NPCR (~99.6%) -- so the rebuilds behave like the published ciphers where it counts.</a:t>
+              <a:t>We reconstructed four real, open-access chaos image ciphers from their equations and ran the audit. Each reproduces the originals' near-ideal entropy (~7.99) and inter-image NPCR (~99.6%), so the rebuilds behave like the published ciphers where it counts.</a:t>
             </a:r>
           </a:p>
           <a:p>
@@ -3349,7 +3349,7 @@
                   <a:srgbClr val="1F3355"/>
                 </a:solidFill>
               </a:rPr>
-              <a:t>Seeding decides the verdict. LSCM-CA (Sun et al. 2025) is key-only -&gt; BROKEN (R = 1.0, 12 chosen plaintexts) -- but only after a GF(2)-affine 'bitlinear' extension to peel its per-pixel cellular-automata layer, which the plain affine/XOR model misses. The other three bind the keystream to the plaintext (SHA-256 / block sum) -&gt; correctly RESIST.</a:t>
+              <a:t>Seeding decides the verdict. LSCM-CA (Sun et al. 2025) is key-only -&gt; BROKEN (R = 1.0, 12 chosen plaintexts), but only after a GF(2)-affine 'bitlinear' extension to peel its per-pixel cellular-automata layer, which the plain affine/XOR model misses. The other three bind the keystream to the plaintext (SHA-256 / block sum) -&gt; correctly RESIST.</a:t>
             </a:r>
           </a:p>
           <a:p>
@@ -3364,7 +3364,7 @@
                   <a:srgbClr val="1F3355"/>
                 </a:solidFill>
               </a:rPr>
-              <a:t>Honest limits: two 'resists' are thin (one injects only a 256-way scalar; one collapses if a 64-pixel seed block is fixed), and the two cheap signals cannot tell genuine binding from a near-miss -- we mark this, not hide it. Reconstructions are paper-only; LLEO is the one fully-validated break.</a:t>
+              <a:t>Honest limits: two 'resists' are thin (one injects only a 256-way scalar; one collapses if a 64-pixel seed block is fixed), and the two cheap signals cannot tell genuine binding from a near-miss. We mark this, not hide it. Reconstructions are paper-only; LLEO is the one fully-validated break.</a:t>
             </a:r>
           </a:p>
         </p:txBody>
@@ -3480,7 +3480,7 @@
                   <a:srgbClr val="1F3355"/>
                 </a:solidFill>
               </a:rPr>
-              <a:t>A flat histogram, ideal entropy, near-zero correlation, and a large inter-image NPCR all hold for our fixed, key-only map -- yet it is broken in 4 queries.</a:t>
+              <a:t>A flat histogram, ideal entropy, near-zero correlation, and a large inter-image NPCR all hold for our fixed, key-only map, yet it is broken in 4 queries.</a:t>
             </a:r>
           </a:p>
           <a:p>
@@ -3510,7 +3510,7 @@
                   <a:srgbClr val="1F3355"/>
                 </a:solidFill>
               </a:rPr>
-              <a:t>The break is sound by construction: LLEO forces its multipliers odd (always invertible), and the equivalent key predicts fresh ciphertexts exactly -- the falsifiable check that the cipher truly ignores the image.</a:t>
+              <a:t>The break is sound by construction: LLEO forces its multipliers odd (always invertible), and the equivalent key predicts fresh ciphertexts exactly, the falsifiable check that the cipher truly ignores the image.</a:t>
             </a:r>
           </a:p>
           <a:p>
@@ -3525,7 +3525,7 @@
                   <a:srgbClr val="1F3355"/>
                 </a:solidFill>
               </a:rPr>
-              <a:t>(The scheme's 'asymmetric' label is also a misnomer -- same keys encrypt and decrypt -- but that is cosmetic.)</a:t>
+              <a:t>(The scheme's 'asymmetric' label is also a misnomer, same keys encrypt and decrypt, but that is cosmetic.)</a:t>
             </a:r>
           </a:p>
         </p:txBody>
@@ -3622,7 +3622,7 @@
                   <a:srgbClr val="1F3355"/>
                 </a:solidFill>
               </a:rPr>
-              <a:t>More than one break: the audit flags every fully key-only scheme in an 8-archetype corpus and, on four real published 2023-2025 ciphers, breaks the one key-only design (LSCM-CA) and clears three plaintext-bound ones -- one break needing a GF(2)-affine extension.</a:t>
+              <a:t>More than one break: the audit flags every fully key-only scheme in an 8-archetype corpus and, on four real published 2023-2025 ciphers, breaks the one key-only design (LSCM-CA) and clears three plaintext-bound ones, one break needing a GF(2)-affine extension.</a:t>
             </a:r>
           </a:p>
           <a:p>
@@ -3652,7 +3652,7 @@
                   <a:srgbClr val="1F3355"/>
                 </a:solidFill>
               </a:rPr>
-              <a:t>Statistical scores should support -- not replace -- an explicit chosen-plaintext argument. Authors of both broken schemes (LLEO and LSCM-CA) emailed at submission; no response yet (responsible disclosure).</a:t>
+              <a:t>Statistical scores should support, not replace, an explicit chosen-plaintext argument. Authors of both broken schemes (LLEO and LSCM-CA) emailed at submission; no response yet (responsible disclosure).</a:t>
             </a:r>
           </a:p>
         </p:txBody>
@@ -3749,7 +3749,7 @@
                   <a:srgbClr val="1F3355"/>
                 </a:solidFill>
               </a:rPr>
-              <a:t>Fidelity: matching entropy/correlation proves nothing -- the load-bearing check is that the recovered key predicts fresh ciphertexts exactly, which only a plaintext-independent cipher can.</a:t>
+              <a:t>Fidelity: matching entropy/correlation proves nothing. The load-bearing check is that the recovered key predicts fresh ciphertexts exactly, which only a plaintext-independent cipher can.</a:t>
             </a:r>
           </a:p>
           <a:p>
@@ -3846,7 +3846,7 @@
                   <a:srgbClr val="1F3355"/>
                 </a:solidFill>
               </a:rPr>
-              <a:t>J. Jain et al., “… image encryption …,” Optik 327:172304, 2025  (target scheme).</a:t>
+              <a:t>J. Jain et al., LLEO chaos-based image-encryption scheme, Optik 327:172304, 2025  (target scheme).</a:t>
             </a:r>
           </a:p>
           <a:p>
@@ -3861,7 +3861,7 @@
                   <a:srgbClr val="1F3355"/>
                 </a:solidFill>
               </a:rPr>
-              <a:t>C. Li et al., “When an attacker meets a cipher-image …,” survey of chaos-cipher breaks, 2019.</a:t>
+              <a:t>C. Li et al., “When an attacker meets a cipher-image,” survey of chaos-cipher breaks, 2019.</a:t>
             </a:r>
           </a:p>
           <a:p>
@@ -4075,7 +4075,7 @@
                   <a:srgbClr val="1F3355"/>
                 </a:solidFill>
               </a:rPr>
-              <a:t>Chaos-based image ciphers scramble a picture using chaotic (random-looking) math. Most follow a permutation–diffusion design: first shuffle the pixels around (confusion), then mask their values with a keystream — a long random-looking sequence the cipher mixes in (diffusion).</a:t>
+              <a:t>Chaos-based image ciphers scramble a picture using chaotic (random-looking) math. Most follow a permutation–diffusion design: first shuffle the pixels around (confusion), then mask their values with a keystream, a long random-looking sequence the cipher mixes in (diffusion).</a:t>
             </a:r>
           </a:p>
           <a:p>
@@ -4090,7 +4090,7 @@
                   <a:srgbClr val="1F3355"/>
                 </a:solidFill>
               </a:rPr>
-              <a:t>Recurring lesson: if that keystream depends only on the secret key (never on the image), the whole cipher is one fixed transformation — so an equivalent key (a stand-in that decrypts any image without being the real key) can be recovered from a few chosen plaintexts (images the attacker picks and has the cipher encrypt).</a:t>
+              <a:t>Recurring lesson: if that keystream depends only on the secret key (never on the image), the whole cipher is one fixed transformation, so an equivalent key (a stand-in that decrypts any image without being the real key) can be recovered from a few chosen plaintexts (images the attacker picks and has the cipher encrypt).</a:t>
             </a:r>
           </a:p>
           <a:p>
@@ -4105,7 +4105,7 @@
                   <a:srgbClr val="1F3355"/>
                 </a:solidFill>
               </a:rPr>
-              <a:t>Second problem (method): schemes are judged by statistics — entropy (a randomness score), neighbouring-pixel correlation, NPCR/UACI — and near-ideal values are treated as proof of security.</a:t>
+              <a:t>Second problem (method): schemes are judged by statistics: entropy (a randomness score), neighbouring-pixel correlation, NPCR/UACI. Near-ideal values are treated as proof of security.</a:t>
             </a:r>
           </a:p>
           <a:p>
@@ -4135,7 +4135,7 @@
                   <a:srgbClr val="1F3355"/>
                 </a:solidFill>
               </a:rPr>
-              <a:t>Why this matters operationally: image ciphers protect real data — medical scans, sealed evidence, access-controlled documents. A break is not a per-image slip but a standing ability to decrypt every future ciphertext of that size, so security must rest on an attack model, not a statistics table.</a:t>
+              <a:t>Why this matters operationally: image ciphers protect real data: medical scans, sealed evidence, access-controlled documents. A break is not a per-image slip but a standing ability to decrypt every future ciphertext of that size, so security must rest on an attack model, not a statistics table.</a:t>
             </a:r>
           </a:p>
           <a:p>
@@ -4150,7 +4150,7 @@
                   <a:srgbClr val="1F3355"/>
                 </a:solidFill>
               </a:rPr>
-              <a:t>We apply both lessons to a 2025 scheme — “LLEO” (Jain et al., Optik, 2025).</a:t>
+              <a:t>We apply both lessons to a 2025 scheme: “LLEO” (Jain et al., Optik, 2025).</a:t>
             </a:r>
           </a:p>
         </p:txBody>
@@ -4256,7 +4256,7 @@
                   <a:srgbClr val="1F3355"/>
                 </a:solidFill>
               </a:rPr>
-              <a:t>Two chaotic maps (simple formulas whose output looks random — Lorenz and logistic) make the keystream that masks each pixel (multiply by K).</a:t>
+              <a:t>Two chaotic maps (simple formulas whose output looks random: Lorenz and logistic) make the keystream that masks each pixel (multiply by K).</a:t>
             </a:r>
           </a:p>
           <a:p>
@@ -4286,7 +4286,7 @@
                   <a:srgbClr val="1F3355"/>
                 </a:solidFill>
               </a:rPr>
-              <a:t>Every key element comes from the secret key alone — nothing depends on the image X.</a:t>
+              <a:t>Every key element comes from the secret key alone, nothing depends on the image X.</a:t>
             </a:r>
           </a:p>
           <a:p>
@@ -4447,7 +4447,7 @@
                   <a:srgbClr val="1F3355"/>
                 </a:solidFill>
               </a:rPr>
-              <a:t>So  C[j] = K[s(j)] · X[s(j)]  (mod 256): each output pixel is exactly one input pixel times a fixed number — a “monomial” map.</a:t>
+              <a:t>So  C[j] = K[s(j)] · X[s(j)]  (mod 256): each output pixel is exactly one input pixel times a fixed number, a “monomial” map.</a:t>
             </a:r>
           </a:p>
           <a:p>
@@ -4544,7 +4544,7 @@
                   <a:srgbClr val="1F3355"/>
                 </a:solidFill>
               </a:rPr>
-              <a:t>(a) The multiplier — 1 query: encrypt an all-ones image; the output directly reveals K at every position.</a:t>
+              <a:t>(a) The multiplier, 1 query: encrypt an all-ones image; the output directly reveals K at every position.</a:t>
             </a:r>
           </a:p>
           <a:p>
@@ -4559,7 +4559,7 @@
                   <a:srgbClr val="1F3355"/>
                 </a:solidFill>
               </a:rPr>
-              <a:t>(b) The reordering — a few queries: encrypt images whose pixels carry their own position number, then divide out the known K to read off where each pixel came from (the map s).</a:t>
+              <a:t>(b) The reordering, a few queries: encrypt images whose pixels carry their own position number, then divide out the known K to read off where each pixel came from (the map s).</a:t>
             </a:r>
           </a:p>
           <a:p>
@@ -4574,7 +4574,7 @@
                   <a:srgbClr val="1F3355"/>
                 </a:solidFill>
               </a:rPr>
-              <a:t>The pair (s, K) is the equivalent key — it inverts any ciphertext:  X[s(j)] = K[s(j)]^-1 · C[j].</a:t>
+              <a:t>The pair (s, K) is the equivalent key. It inverts any ciphertext:  X[s(j)] = K[s(j)]^-1 · C[j].</a:t>
             </a:r>
           </a:p>
           <a:p>
@@ -4589,7 +4589,7 @@
                   <a:srgbClr val="1F3355"/>
                 </a:solidFill>
               </a:rPr>
-              <a:t>Total cost: 1 + ceil(log_256 MN) chosen plaintexts = just 4 for a 512×512 image — no matter how long the advertised key is.</a:t>
+              <a:t>Total cost: 1 + ceil(log_256 MN) chosen plaintexts = just 4 for a 512×512 image, no matter how long the advertised key is.</a:t>
             </a:r>
           </a:p>
           <a:p>
@@ -4686,7 +4686,7 @@
                   <a:srgbClr val="1F3355"/>
                 </a:solidFill>
               </a:rPr>
-              <a:t>Reconstructed LLEO from its published description — reimplemented from scratch, no code reused.</a:t>
+              <a:t>Reconstructed LLEO from its published description, reimplemented from scratch, no code reused.</a:t>
             </a:r>
           </a:p>
           <a:p>
@@ -4867,7 +4867,7 @@
                   <a:srgbClr val="1F3355"/>
                 </a:solidFill>
               </a:rPr>
-              <a:t>Decryption in 0.037 s at 512x512 (single core) — no key used.</a:t>
+              <a:t>Decryption in 0.037 s at 512x512 (single core), no key used.</a:t>
             </a:r>
           </a:p>
         </p:txBody>
@@ -5114,7 +5114,7 @@
                   <a:srgbClr val="1F3355"/>
                 </a:solidFill>
               </a:rPr>
-              <a:t>By every usual yardstick LLEO looks strong — yet it is broken in 4 queries.</a:t>
+              <a:t>By every usual yardstick LLEO looks strong, yet it is broken in 4 queries.</a:t>
             </a:r>
           </a:p>
         </p:txBody>
@@ -5235,7 +5235,7 @@
                   <a:srgbClr val="1F3355"/>
                 </a:solidFill>
               </a:rPr>
-              <a:t>But with no diffusion, flipping one input pixel changes exactly one output pixel — so the true value is 100/MN ~ 0.0004%, five orders of magnitude smaller.</a:t>
+              <a:t>But with no diffusion, flipping one input pixel changes exactly one output pixel, so the true value is 100/MN ~ 0.0004%, five orders of magnitude smaller.</a:t>
             </a:r>
           </a:p>
           <a:p>

--- a/papers/paper1-chaos-cpa/presentation.pptx
+++ b/papers/paper1-chaos-cpa/presentation.pptx
@@ -25,6 +25,7 @@
     <p:sldId id="270" r:id="rId21"/>
     <p:sldId id="271" r:id="rId22"/>
     <p:sldId id="272" r:id="rId23"/>
+    <p:sldId id="273" r:id="rId24"/>
   </p:sldIdLst>
   <p:sldSz cx="12192000" cy="6858000"/>
   <p:notesSz cx="6858000" cy="9144000"/>
@@ -3442,26 +3443,50 @@
                   <a:srgbClr val="1F3355"/>
                 </a:solidFill>
               </a:rPr>
-              <a:t>Discussion: good statistics are not security</a:t>
-            </a:r>
-          </a:p>
-        </p:txBody>
-      </p:sp>
-      <p:sp>
-        <p:nvSpPr>
-          <p:cNvPr id="3" name="Content Placeholder 2"/>
-          <p:cNvSpPr>
-            <a:spLocks noGrp="1"/>
-          </p:cNvSpPr>
-          <p:nvPr>
-            <p:ph idx="1"/>
-          </p:nvPr>
-        </p:nvSpPr>
-        <p:spPr>
-          <a:xfrm>
-            <a:off x="640080" y="1783080"/>
-            <a:ext cx="10927080" cy="4114800"/>
-          </a:xfrm>
+              <a:t>The graded fix: plaintext-keying capacity beta</a:t>
+            </a:r>
+          </a:p>
+        </p:txBody>
+      </p:sp>
+      <p:pic>
+        <p:nvPicPr>
+          <p:cNvPr id="3" name="Picture 2" descr="p1_beta_before_after.png"/>
+          <p:cNvPicPr>
+            <a:picLocks noChangeAspect="1"/>
+          </p:cNvPicPr>
+          <p:nvPr/>
+        </p:nvPicPr>
+        <p:blipFill>
+          <a:blip r:embed="rId2"/>
+          <a:stretch>
+            <a:fillRect/>
+          </a:stretch>
+        </p:blipFill>
+        <p:spPr>
+          <a:xfrm>
+            <a:off x="320040" y="2067927"/>
+            <a:ext cx="7132320" cy="2841017"/>
+          </a:xfrm>
+          <a:prstGeom prst="rect">
+            <a:avLst/>
+          </a:prstGeom>
+        </p:spPr>
+      </p:pic>
+      <p:sp>
+        <p:nvSpPr>
+          <p:cNvPr id="4" name="TextBox 3"/>
+          <p:cNvSpPr txBox="1"/>
+          <p:nvPr/>
+        </p:nvSpPr>
+        <p:spPr>
+          <a:xfrm>
+            <a:off x="7498080" y="1600200"/>
+            <a:ext cx="4663440" cy="4206240"/>
+          </a:xfrm>
+          <a:prstGeom prst="rect">
+            <a:avLst/>
+          </a:prstGeom>
+          <a:noFill/>
         </p:spPr>
         <p:txBody>
           <a:bodyPr wrap="square">
@@ -3469,63 +3494,82 @@
           </a:bodyPr>
           <a:lstStyle/>
           <a:p>
-            <a:pPr>
-              <a:spcAft>
-                <a:spcPts val="400"/>
-              </a:spcAft>
-            </a:pPr>
-            <a:r>
-              <a:rPr sz="1800">
-                <a:solidFill>
-                  <a:srgbClr val="1F3355"/>
-                </a:solidFill>
-              </a:rPr>
-              <a:t>A flat histogram, ideal entropy, near-zero correlation, and a large inter-image NPCR all hold for our fixed, key-only map, yet it is broken in 4 queries.</a:t>
-            </a:r>
-          </a:p>
-          <a:p>
-            <a:pPr>
-              <a:spcAft>
-                <a:spcPts val="400"/>
-              </a:spcAft>
-            </a:pPr>
-            <a:r>
-              <a:rPr sz="1800">
-                <a:solidFill>
-                  <a:srgbClr val="1F3355"/>
-                </a:solidFill>
-              </a:rPr>
-              <a:t>The single deciding question is binary: does any key material depend on the image? The oracle answers it automatically for any scheme.</a:t>
-            </a:r>
-          </a:p>
-          <a:p>
-            <a:pPr>
-              <a:spcAft>
-                <a:spcPts val="400"/>
-              </a:spcAft>
-            </a:pPr>
-            <a:r>
-              <a:rPr sz="1800">
-                <a:solidFill>
-                  <a:srgbClr val="1F3355"/>
-                </a:solidFill>
-              </a:rPr>
-              <a:t>The break is sound by construction: LLEO forces its multipliers odd (always invertible), and the equivalent key predicts fresh ciphertexts exactly, the falsifiable check that the cipher truly ignores the image.</a:t>
-            </a:r>
-          </a:p>
-          <a:p>
-            <a:pPr>
-              <a:spcAft>
-                <a:spcPts val="400"/>
-              </a:spcAft>
-            </a:pPr>
-            <a:r>
-              <a:rPr sz="1800">
-                <a:solidFill>
-                  <a:srgbClr val="1F3355"/>
-                </a:solidFill>
-              </a:rPr>
-              <a:t>(The scheme's 'asymmetric' label is also a misnomer, same keys encrypt and decrypt, but that is cosmetic.)</a:t>
+            <a:pPr algn="l">
+              <a:spcAft>
+                <a:spcPts val="400"/>
+              </a:spcAft>
+            </a:pPr>
+            <a:r>
+              <a:rPr sz="1600">
+                <a:solidFill>
+                  <a:srgbClr val="1F3355"/>
+                </a:solidFill>
+              </a:rPr>
+              <a:t>The avalanche and recoverability signals cannot tell a fragile near-miss from genuine binding: the two schemes overlap (left). So we add a graded capacity beta: how many genuinely different ciphers the plaintext can switch the cipher's map between.</a:t>
+            </a:r>
+          </a:p>
+          <a:p>
+            <a:pPr algn="l">
+              <a:spcAft>
+                <a:spcPts val="400"/>
+              </a:spcAft>
+            </a:pPr>
+            <a:r>
+              <a:rPr sz="1600">
+                <a:solidFill>
+                  <a:srgbClr val="1F3355"/>
+                </a:solidFill>
+              </a:rPr>
+              <a:t>beta = 0 means one fixed map (key-only, BROKEN); a large beta means every image gets its own unrelated map (RESISTS). It is estimated black-box from chosen plaintexts as a collision rate.</a:t>
+            </a:r>
+          </a:p>
+          <a:p>
+            <a:pPr algn="l">
+              <a:spcAft>
+                <a:spcPts val="400"/>
+              </a:spcAft>
+            </a:pPr>
+            <a:r>
+              <a:rPr sz="1600">
+                <a:solidFill>
+                  <a:srgbClr val="1F3355"/>
+                </a:solidFill>
+              </a:rPr>
+              <a:t>So beta separates the schemes the two signals could not: a fragile 256-way scalar (beta = 8) from genuine SHA-256 binding (beta &gt;= 32), turning the one-bit verdict into a measured, falsifiable gap.</a:t>
+            </a:r>
+          </a:p>
+        </p:txBody>
+      </p:sp>
+      <p:sp>
+        <p:nvSpPr>
+          <p:cNvPr id="5" name="TextBox 4"/>
+          <p:cNvSpPr txBox="1"/>
+          <p:nvPr/>
+        </p:nvSpPr>
+        <p:spPr>
+          <a:xfrm>
+            <a:off x="320040" y="5513832"/>
+            <a:ext cx="7132320" cy="365760"/>
+          </a:xfrm>
+          <a:prstGeom prst="rect">
+            <a:avLst/>
+          </a:prstGeom>
+          <a:noFill/>
+        </p:spPr>
+        <p:txBody>
+          <a:bodyPr wrap="none">
+            <a:spAutoFit/>
+          </a:bodyPr>
+          <a:lstStyle/>
+          <a:p>
+            <a:pPr algn="ctr"/>
+            <a:r>
+              <a:rPr sz="1200" i="1">
+                <a:solidFill>
+                  <a:srgbClr val="555555"/>
+                </a:solidFill>
+              </a:rPr>
+              <a:t>Left: the two cheap signals overlap. Right: the beta axis separates fragile from genuine.</a:t>
             </a:r>
           </a:p>
         </p:txBody>
@@ -3569,7 +3613,7 @@
                   <a:srgbClr val="1F3355"/>
                 </a:solidFill>
               </a:rPr>
-              <a:t>Conclusions, remedies, and disclosure</a:t>
+              <a:t>Discussion: good statistics are not security</a:t>
             </a:r>
           </a:p>
         </p:txBody>
@@ -3607,7 +3651,7 @@
                   <a:srgbClr val="1F3355"/>
                 </a:solidFill>
               </a:rPr>
-              <a:t>LLEO is completely broken by an equivalent-key chosen-plaintext attack in 4 queries and a fraction of a second, despite near-ideal statistics.</a:t>
+              <a:t>A flat histogram, ideal entropy, near-zero correlation, and a large inter-image NPCR all hold for our fixed, key-only map, yet it is broken in 4 queries.</a:t>
             </a:r>
           </a:p>
           <a:p>
@@ -3622,7 +3666,7 @@
                   <a:srgbClr val="1F3355"/>
                 </a:solidFill>
               </a:rPr>
-              <a:t>More than one break: the audit flags every fully key-only scheme in an 8-archetype corpus and, on four real published 2023-2025 ciphers, breaks the one key-only design (LSCM-CA) and clears three plaintext-bound ones, one break needing a GF(2)-affine extension.</a:t>
+              <a:t>The single deciding question is binary: does any key material depend on the image? The oracle answers it automatically for any scheme.</a:t>
             </a:r>
           </a:p>
           <a:p>
@@ -3637,7 +3681,7 @@
                   <a:srgbClr val="1F3355"/>
                 </a:solidFill>
               </a:rPr>
-              <a:t>Remedies (standard): (i) tie the keystream to the image (seed the chaos from a SHA-256 hash of the image); (ii) add real diffusion (a chaining rule). The identical attack then recovers 100% of pixels against the key-only cipher but only 0.25% (chance) once the keystream is image-seeded.</a:t>
+              <a:t>The break is sound by construction: LLEO forces its multipliers odd (always invertible), and the equivalent key predicts fresh ciphertexts exactly, the falsifiable check that the cipher truly ignores the image.</a:t>
             </a:r>
           </a:p>
           <a:p>
@@ -3652,7 +3696,7 @@
                   <a:srgbClr val="1F3355"/>
                 </a:solidFill>
               </a:rPr>
-              <a:t>Statistical scores should support, not replace, an explicit chosen-plaintext argument. Authors of both broken schemes (LLEO and LSCM-CA) emailed at submission; no response yet (responsible disclosure).</a:t>
+              <a:t>(The scheme's 'asymmetric' label is also a misnomer, same keys encrypt and decrypt, but that is cosmetic.)</a:t>
             </a:r>
           </a:p>
         </p:txBody>
@@ -3696,7 +3740,7 @@
                   <a:srgbClr val="1F3355"/>
                 </a:solidFill>
               </a:rPr>
-              <a:t>Appendix: why the break is sound (invertibility &amp; fidelity)</a:t>
+              <a:t>Conclusions, remedies, and disclosure</a:t>
             </a:r>
           </a:p>
         </p:txBody>
@@ -3734,7 +3778,7 @@
                   <a:srgbClr val="1F3355"/>
                 </a:solidFill>
               </a:rPr>
-              <a:t>Odd multipliers: LLEO inverts its substitution by a modular conjugate, which forces every multiplier odd (always invertible mod 256). On the reconstruction all are odd and E(0)=0 holds exactly; if even multipliers were allowed the oracle degrades gracefully (about half the positions recovered) rather than returning a wrong inverse.</a:t>
+              <a:t>LLEO is completely broken by an equivalent-key chosen-plaintext attack in 4 queries and a fraction of a second, despite near-ideal statistics.</a:t>
             </a:r>
           </a:p>
           <a:p>
@@ -3749,7 +3793,7 @@
                   <a:srgbClr val="1F3355"/>
                 </a:solidFill>
               </a:rPr>
-              <a:t>Fidelity: matching entropy/correlation proves nothing. The load-bearing check is that the recovered key predicts fresh ciphertexts exactly, which only a plaintext-independent cipher can.</a:t>
+              <a:t>More than one break: the audit flags every fully key-only scheme in an 8-archetype corpus and, on four real published 2023-2025 ciphers, breaks the one key-only design (LSCM-CA) and clears three plaintext-bound ones, one break needing a GF(2)-affine extension.</a:t>
             </a:r>
           </a:p>
           <a:p>
@@ -3764,7 +3808,22 @@
                   <a:srgbClr val="1F3355"/>
                 </a:solidFill>
               </a:rPr>
-              <a:t>Generality &amp; scale: a very different XOR-and-chain (CBC-like) cipher also falls in 3-4 chosen plaintexts; cost grows only logarithmically with image size (3-4 plaintexts up to 1024x1024).</a:t>
+              <a:t>Remedies (standard): (i) tie the keystream to the image (seed the chaos from a SHA-256 hash of the image); (ii) add real diffusion (a chaining rule). The identical attack then recovers 100% of pixels against the key-only cipher but only 0.25% (chance) once the keystream is image-seeded.</a:t>
+            </a:r>
+          </a:p>
+          <a:p>
+            <a:pPr>
+              <a:spcAft>
+                <a:spcPts val="400"/>
+              </a:spcAft>
+            </a:pPr>
+            <a:r>
+              <a:rPr sz="1800">
+                <a:solidFill>
+                  <a:srgbClr val="1F3355"/>
+                </a:solidFill>
+              </a:rPr>
+              <a:t>Statistical scores should support, not replace, an explicit chosen-plaintext argument. Authors of both broken schemes (LLEO and LSCM-CA) emailed at submission; no response yet (responsible disclosure).</a:t>
             </a:r>
           </a:p>
         </p:txBody>
@@ -3808,7 +3867,7 @@
                   <a:srgbClr val="1F3355"/>
                 </a:solidFill>
               </a:rPr>
-              <a:t>Selected references</a:t>
+              <a:t>Appendix: why the break is sound (invertibility &amp; fidelity)</a:t>
             </a:r>
           </a:p>
         </p:txBody>
@@ -3846,7 +3905,7 @@
                   <a:srgbClr val="1F3355"/>
                 </a:solidFill>
               </a:rPr>
-              <a:t>J. Jain et al., LLEO chaos-based image-encryption scheme, Optik 327:172304, 2025  (target scheme).</a:t>
+              <a:t>Odd multipliers: LLEO inverts its substitution by a modular conjugate, which forces every multiplier odd (always invertible mod 256). On the reconstruction all are odd and E(0)=0 holds exactly; if even multipliers were allowed the oracle degrades gracefully (about half the positions recovered) rather than returning a wrong inverse.</a:t>
             </a:r>
           </a:p>
           <a:p>
@@ -3861,7 +3920,7 @@
                   <a:srgbClr val="1F3355"/>
                 </a:solidFill>
               </a:rPr>
-              <a:t>C. Li et al., “When an attacker meets a cipher-image,” survey of chaos-cipher breaks, 2019.</a:t>
+              <a:t>Fidelity: matching entropy/correlation proves nothing. The load-bearing check is that the recovered key predicts fresh ciphertexts exactly, which only a plaintext-independent cipher can.</a:t>
             </a:r>
           </a:p>
           <a:p>
@@ -3876,37 +3935,7 @@
                   <a:srgbClr val="1F3355"/>
                 </a:solidFill>
               </a:rPr>
-              <a:t>G. Alvarez and S. Li, “Some basic cryptographic requirements for chaos-based cryptosystems,” 2006.</a:t>
-            </a:r>
-          </a:p>
-          <a:p>
-            <a:pPr>
-              <a:spcAft>
-                <a:spcPts val="400"/>
-              </a:spcAft>
-            </a:pPr>
-            <a:r>
-              <a:rPr sz="1800">
-                <a:solidFill>
-                  <a:srgbClr val="1F3355"/>
-                </a:solidFill>
-              </a:rPr>
-              <a:t>C.-Y. Li and C.-C. Lo, optimal known/chosen-plaintext bound for permutation-only ciphers, 2011.</a:t>
-            </a:r>
-          </a:p>
-          <a:p>
-            <a:pPr>
-              <a:spcAft>
-                <a:spcPts val="400"/>
-              </a:spcAft>
-            </a:pPr>
-            <a:r>
-              <a:rPr sz="1800">
-                <a:solidFill>
-                  <a:srgbClr val="1F3355"/>
-                </a:solidFill>
-              </a:rPr>
-              <a:t>Y. Wu et al., NPCR and UACI randomness tests for image encryption, 2011.</a:t>
+              <a:t>Generality &amp; scale: a very different XOR-and-chain (CBC-like) cipher also falls in 3-4 chosen plaintexts; cost grows only logarithmically with image size (3-4 plaintexts up to 1024x1024).</a:t>
             </a:r>
           </a:p>
         </p:txBody>
@@ -3920,6 +3949,148 @@
 </file>
 
 <file path=ppt/slides/slide17.xml><?xml version="1.0" encoding="utf-8"?>
+<p:sld xmlns:a="http://schemas.openxmlformats.org/drawingml/2006/main" xmlns:p="http://schemas.openxmlformats.org/presentationml/2006/main" xmlns:r="http://schemas.openxmlformats.org/officeDocument/2006/relationships">
+  <p:cSld>
+    <p:spTree>
+      <p:nvGrpSpPr>
+        <p:cNvPr id="1" name=""/>
+        <p:cNvGrpSpPr/>
+        <p:nvPr/>
+      </p:nvGrpSpPr>
+      <p:grpSpPr/>
+      <p:sp>
+        <p:nvSpPr>
+          <p:cNvPr id="2" name="Title 1"/>
+          <p:cNvSpPr>
+            <a:spLocks noGrp="1"/>
+          </p:cNvSpPr>
+          <p:nvPr>
+            <p:ph type="title"/>
+          </p:nvPr>
+        </p:nvSpPr>
+        <p:spPr/>
+        <p:txBody>
+          <a:bodyPr/>
+          <a:lstStyle/>
+          <a:p>
+            <a:r>
+              <a:rPr sz="3000" b="1">
+                <a:solidFill>
+                  <a:srgbClr val="1F3355"/>
+                </a:solidFill>
+              </a:rPr>
+              <a:t>Selected references</a:t>
+            </a:r>
+          </a:p>
+        </p:txBody>
+      </p:sp>
+      <p:sp>
+        <p:nvSpPr>
+          <p:cNvPr id="3" name="Content Placeholder 2"/>
+          <p:cNvSpPr>
+            <a:spLocks noGrp="1"/>
+          </p:cNvSpPr>
+          <p:nvPr>
+            <p:ph idx="1"/>
+          </p:nvPr>
+        </p:nvSpPr>
+        <p:spPr>
+          <a:xfrm>
+            <a:off x="640080" y="1783080"/>
+            <a:ext cx="10927080" cy="4114800"/>
+          </a:xfrm>
+        </p:spPr>
+        <p:txBody>
+          <a:bodyPr wrap="square">
+            <a:normAutofit/>
+          </a:bodyPr>
+          <a:lstStyle/>
+          <a:p>
+            <a:pPr>
+              <a:spcAft>
+                <a:spcPts val="400"/>
+              </a:spcAft>
+            </a:pPr>
+            <a:r>
+              <a:rPr sz="1800">
+                <a:solidFill>
+                  <a:srgbClr val="1F3355"/>
+                </a:solidFill>
+              </a:rPr>
+              <a:t>J. Jain et al., LLEO chaos-based image-encryption scheme, Optik 327:172304, 2025  (target scheme).</a:t>
+            </a:r>
+          </a:p>
+          <a:p>
+            <a:pPr>
+              <a:spcAft>
+                <a:spcPts val="400"/>
+              </a:spcAft>
+            </a:pPr>
+            <a:r>
+              <a:rPr sz="1800">
+                <a:solidFill>
+                  <a:srgbClr val="1F3355"/>
+                </a:solidFill>
+              </a:rPr>
+              <a:t>C. Li et al., “When an attacker meets a cipher-image,” survey of chaos-cipher breaks, 2019.</a:t>
+            </a:r>
+          </a:p>
+          <a:p>
+            <a:pPr>
+              <a:spcAft>
+                <a:spcPts val="400"/>
+              </a:spcAft>
+            </a:pPr>
+            <a:r>
+              <a:rPr sz="1800">
+                <a:solidFill>
+                  <a:srgbClr val="1F3355"/>
+                </a:solidFill>
+              </a:rPr>
+              <a:t>G. Alvarez and S. Li, “Some basic cryptographic requirements for chaos-based cryptosystems,” 2006.</a:t>
+            </a:r>
+          </a:p>
+          <a:p>
+            <a:pPr>
+              <a:spcAft>
+                <a:spcPts val="400"/>
+              </a:spcAft>
+            </a:pPr>
+            <a:r>
+              <a:rPr sz="1800">
+                <a:solidFill>
+                  <a:srgbClr val="1F3355"/>
+                </a:solidFill>
+              </a:rPr>
+              <a:t>C.-Y. Li and C.-C. Lo, optimal known/chosen-plaintext bound for permutation-only ciphers, 2011.</a:t>
+            </a:r>
+          </a:p>
+          <a:p>
+            <a:pPr>
+              <a:spcAft>
+                <a:spcPts val="400"/>
+              </a:spcAft>
+            </a:pPr>
+            <a:r>
+              <a:rPr sz="1800">
+                <a:solidFill>
+                  <a:srgbClr val="1F3355"/>
+                </a:solidFill>
+              </a:rPr>
+              <a:t>Y. Wu et al., NPCR and UACI randomness tests for image encryption, 2011.</a:t>
+            </a:r>
+          </a:p>
+        </p:txBody>
+      </p:sp>
+    </p:spTree>
+  </p:cSld>
+  <p:clrMapOvr>
+    <a:masterClrMapping/>
+  </p:clrMapOvr>
+</p:sld>
+</file>
+
+<file path=ppt/slides/slide18.xml><?xml version="1.0" encoding="utf-8"?>
 <p:sld xmlns:a="http://schemas.openxmlformats.org/drawingml/2006/main" xmlns:p="http://schemas.openxmlformats.org/presentationml/2006/main" xmlns:r="http://schemas.openxmlformats.org/officeDocument/2006/relationships">
   <p:cSld>
     <p:spTree>

--- a/papers/paper1-chaos-cpa/presentation.pptx
+++ b/papers/paper1-chaos-cpa/presentation.pptx
@@ -2818,7 +2818,7 @@
             <a:r>
               <a:rPr sz="3000" b="1">
                 <a:solidFill>
-                  <a:srgbClr val="1F3355"/>
+                  <a:srgbClr val="1F4E6B"/>
                 </a:solidFill>
               </a:rPr>
               <a:t>An Equivalent-Key Chosen-Plaintext Break of a 2025 Chaos-Based Image Cipher</a:t>
@@ -2856,7 +2856,7 @@
             <a:r>
               <a:rPr sz="1800">
                 <a:solidFill>
-                  <a:srgbClr val="1F3355"/>
+                  <a:srgbClr val="1F4E6B"/>
                 </a:solidFill>
               </a:rPr>
               <a:t>Good statistics are not security: a 2025 cipher broken in 4 chosen plaintexts</a:t>
@@ -2871,7 +2871,7 @@
             <a:r>
               <a:rPr sz="1800">
                 <a:solidFill>
-                  <a:srgbClr val="1F3355"/>
+                  <a:srgbClr val="1F4E6B"/>
                 </a:solidFill>
               </a:rPr>
               <a:t>UBMK’25 · International Conference on Computer Science and Engineering</a:t>
@@ -2886,7 +2886,7 @@
             <a:r>
               <a:rPr sz="1800">
                 <a:solidFill>
-                  <a:srgbClr val="1F3355"/>
+                  <a:srgbClr val="1F4E6B"/>
                 </a:solidFill>
               </a:rPr>
               <a:t>Track: Computer and Data Security</a:t>
@@ -2901,7 +2901,7 @@
             <a:r>
               <a:rPr sz="1800">
                 <a:solidFill>
-                  <a:srgbClr val="1F3355"/>
+                  <a:srgbClr val="1F4E6B"/>
                 </a:solidFill>
               </a:rPr>
               <a:t>Author(s) and affiliation withheld for review</a:t>
@@ -2945,7 +2945,7 @@
             <a:r>
               <a:rPr sz="3000" b="1">
                 <a:solidFill>
-                  <a:srgbClr val="1F3355"/>
+                  <a:srgbClr val="1F4E6B"/>
                 </a:solidFill>
               </a:rPr>
               <a:t>Even the chaotic keystreams are not evenly random</a:t>
@@ -3007,7 +3007,7 @@
             <a:r>
               <a:rPr sz="1600">
                 <a:solidFill>
-                  <a:srgbClr val="1F3355"/>
+                  <a:srgbClr val="1F4E6B"/>
                 </a:solidFill>
               </a:rPr>
               <a:t>A chi-square test (a standard check for whether values are evenly spread) strongly rejects “evenly random” for both chaotic streams (logistic chi^2 ~ 5.3×10^5).</a:t>
@@ -3022,7 +3022,7 @@
             <a:r>
               <a:rPr sz="1600">
                 <a:solidFill>
-                  <a:srgbClr val="1F3355"/>
+                  <a:srgbClr val="1F4E6B"/>
                 </a:solidFill>
               </a:rPr>
               <a:t>A secure keystream would be flat, like the uniform reference row at the bottom.</a:t>
@@ -3056,7 +3056,7 @@
             <a:r>
               <a:rPr sz="1200" i="1">
                 <a:solidFill>
-                  <a:srgbClr val="555555"/>
+                  <a:srgbClr val="6B7079"/>
                 </a:solidFill>
               </a:rPr>
               <a:t>How often each byte value appears: logistic and Lorenz vs. a truly uniform source.</a:t>
@@ -3100,7 +3100,7 @@
             <a:r>
               <a:rPr sz="3000" b="1">
                 <a:solidFill>
-                  <a:srgbClr val="1F3355"/>
+                  <a:srgbClr val="1F4E6B"/>
                 </a:solidFill>
               </a:rPr>
               <a:t>The contribution: a reusable structural audit</a:t>
@@ -3162,7 +3162,7 @@
             <a:r>
               <a:rPr sz="1600">
                 <a:solidFill>
-                  <a:srgbClr val="1F3355"/>
+                  <a:srgbClr val="1F4E6B"/>
                 </a:solidFill>
               </a:rPr>
               <a:t>We package the attack as a black-box test: given only the ability to encrypt chosen images, it decides whether a cipher is one fixed plaintext-independent map and, if so, recovers an equivalent key, knowing nothing about the scheme inside, and CERTIFYING each verdict by predicting fresh ciphertext exactly (a check we prove sound).</a:t>
@@ -3177,7 +3177,7 @@
             <a:r>
               <a:rPr sz="1600">
                 <a:solidFill>
-                  <a:srgbClr val="1F3355"/>
+                  <a:srgbClr val="1F4E6B"/>
                 </a:solidFill>
               </a:rPr>
               <a:t>On 8 structural archetypes it breaks all 5 fully key-only ones at R = 1 in &lt;= 5 chosen plaintexts (chaos, permutation, additive, affine, even a modern AES-CTR key stream); 2 image-/nonce-bound schemes correctly resist; a 6th, with non-invertible multipliers, degrades GRACEFULLY (R = 0.52, PARTIAL), the deliberate boundary.</a:t>
@@ -3192,7 +3192,7 @@
             <a:r>
               <a:rPr sz="1600">
                 <a:solidFill>
-                  <a:srgbClr val="1F3355"/>
+                  <a:srgbClr val="1F4E6B"/>
                 </a:solidFill>
               </a:rPr>
               <a:t>The chaos was never the point: a reused, image-independent keystream is. This is a reusable audit, not a one-paper break.</a:t>
@@ -3226,7 +3226,7 @@
             <a:r>
               <a:rPr sz="1200" i="1">
                 <a:solidFill>
-                  <a:srgbClr val="555555"/>
+                  <a:srgbClr val="6B7079"/>
                 </a:solidFill>
               </a:rPr>
               <a:t>Recoverability R per scheme on an archetype corpus (red = broken, green = resists); chosen plaintexts at 512x512.</a:t>
@@ -3270,7 +3270,7 @@
             <a:r>
               <a:rPr sz="3000" b="1">
                 <a:solidFill>
-                  <a:srgbClr val="1F3355"/>
+                  <a:srgbClr val="1F4E6B"/>
                 </a:solidFill>
               </a:rPr>
               <a:t>Run on four real published 2023–2025 ciphers</a:t>
@@ -3332,7 +3332,7 @@
             <a:r>
               <a:rPr sz="1600">
                 <a:solidFill>
-                  <a:srgbClr val="1F3355"/>
+                  <a:srgbClr val="1F4E6B"/>
                 </a:solidFill>
               </a:rPr>
               <a:t>We reconstructed four real, open-access chaos image ciphers from their equations and ran the audit. Each reproduces the originals' near-ideal entropy (~7.99) and inter-image NPCR (~99.6%), so the rebuilds behave like the published ciphers where it counts.</a:t>
@@ -3347,7 +3347,7 @@
             <a:r>
               <a:rPr sz="1600">
                 <a:solidFill>
-                  <a:srgbClr val="1F3355"/>
+                  <a:srgbClr val="1F4E6B"/>
                 </a:solidFill>
               </a:rPr>
               <a:t>Seeding decides the verdict. LSCM-CA (Sun et al. 2025) is key-only -&gt; BROKEN (R = 1.0, 12 chosen plaintexts), but only after a GF(2)-affine 'bitlinear' extension to peel its per-pixel cellular-automata layer, which the plain affine/XOR model misses. The other three bind the keystream to the plaintext (SHA-256 / block sum) -&gt; correctly RESIST.</a:t>
@@ -3362,7 +3362,7 @@
             <a:r>
               <a:rPr sz="1600">
                 <a:solidFill>
-                  <a:srgbClr val="1F3355"/>
+                  <a:srgbClr val="1F4E6B"/>
                 </a:solidFill>
               </a:rPr>
               <a:t>Honest limits: two 'resists' are thin (one injects only a 256-way scalar; one collapses if a 64-pixel seed block is fixed), and the two cheap signals cannot tell genuine binding from a near-miss. We mark this, not hide it. Reconstructions are paper-only; LLEO is the one fully-validated break.</a:t>
@@ -3396,7 +3396,7 @@
             <a:r>
               <a:rPr sz="1200" i="1">
                 <a:solidFill>
-                  <a:srgbClr val="555555"/>
+                  <a:srgbClr val="6B7079"/>
                 </a:solidFill>
               </a:rPr>
               <a:t>The audit in its two signals (avalanche vs. recoverability) on real schemes rebuilt from their papers.</a:t>
@@ -3440,7 +3440,7 @@
             <a:r>
               <a:rPr sz="3000" b="1">
                 <a:solidFill>
-                  <a:srgbClr val="1F3355"/>
+                  <a:srgbClr val="1F4E6B"/>
                 </a:solidFill>
               </a:rPr>
               <a:t>The graded fix: plaintext-keying capacity beta</a:t>
@@ -3502,7 +3502,7 @@
             <a:r>
               <a:rPr sz="1600">
                 <a:solidFill>
-                  <a:srgbClr val="1F3355"/>
+                  <a:srgbClr val="1F4E6B"/>
                 </a:solidFill>
               </a:rPr>
               <a:t>The avalanche and recoverability signals cannot tell a fragile near-miss from genuine binding: the two schemes overlap (left). So we add a graded capacity beta: how many genuinely different ciphers the plaintext can switch the cipher's map between.</a:t>
@@ -3517,7 +3517,7 @@
             <a:r>
               <a:rPr sz="1600">
                 <a:solidFill>
-                  <a:srgbClr val="1F3355"/>
+                  <a:srgbClr val="1F4E6B"/>
                 </a:solidFill>
               </a:rPr>
               <a:t>beta = 0 means one fixed map (key-only, BROKEN); a large beta means every image gets its own unrelated map (RESISTS). It is estimated black-box from chosen plaintexts as a collision rate.</a:t>
@@ -3532,7 +3532,7 @@
             <a:r>
               <a:rPr sz="1600">
                 <a:solidFill>
-                  <a:srgbClr val="1F3355"/>
+                  <a:srgbClr val="1F4E6B"/>
                 </a:solidFill>
               </a:rPr>
               <a:t>So beta separates the schemes the two signals could not: a fragile 256-way scalar (beta = 8) from genuine SHA-256 binding (beta &gt;= 32), turning the one-bit verdict into a measured, falsifiable gap.</a:t>
@@ -3566,7 +3566,7 @@
             <a:r>
               <a:rPr sz="1200" i="1">
                 <a:solidFill>
-                  <a:srgbClr val="555555"/>
+                  <a:srgbClr val="6B7079"/>
                 </a:solidFill>
               </a:rPr>
               <a:t>Left: the two cheap signals overlap. Right: the beta axis separates fragile from genuine.</a:t>
@@ -3610,7 +3610,7 @@
             <a:r>
               <a:rPr sz="3000" b="1">
                 <a:solidFill>
-                  <a:srgbClr val="1F3355"/>
+                  <a:srgbClr val="1F4E6B"/>
                 </a:solidFill>
               </a:rPr>
               <a:t>Discussion: good statistics are not security</a:t>
@@ -3648,7 +3648,7 @@
             <a:r>
               <a:rPr sz="1800">
                 <a:solidFill>
-                  <a:srgbClr val="1F3355"/>
+                  <a:srgbClr val="1F4E6B"/>
                 </a:solidFill>
               </a:rPr>
               <a:t>A flat histogram, ideal entropy, near-zero correlation, and a large inter-image NPCR all hold for our fixed, key-only map, yet it is broken in 4 queries.</a:t>
@@ -3663,7 +3663,7 @@
             <a:r>
               <a:rPr sz="1800">
                 <a:solidFill>
-                  <a:srgbClr val="1F3355"/>
+                  <a:srgbClr val="1F4E6B"/>
                 </a:solidFill>
               </a:rPr>
               <a:t>The single deciding question is binary: does any key material depend on the image? The oracle answers it automatically for any scheme.</a:t>
@@ -3678,7 +3678,7 @@
             <a:r>
               <a:rPr sz="1800">
                 <a:solidFill>
-                  <a:srgbClr val="1F3355"/>
+                  <a:srgbClr val="1F4E6B"/>
                 </a:solidFill>
               </a:rPr>
               <a:t>The break is sound by construction: LLEO forces its multipliers odd (always invertible), and the equivalent key predicts fresh ciphertexts exactly, the falsifiable check that the cipher truly ignores the image.</a:t>
@@ -3693,7 +3693,7 @@
             <a:r>
               <a:rPr sz="1800">
                 <a:solidFill>
-                  <a:srgbClr val="1F3355"/>
+                  <a:srgbClr val="1F4E6B"/>
                 </a:solidFill>
               </a:rPr>
               <a:t>(The scheme's 'asymmetric' label is also a misnomer, same keys encrypt and decrypt, but that is cosmetic.)</a:t>
@@ -3737,7 +3737,7 @@
             <a:r>
               <a:rPr sz="3000" b="1">
                 <a:solidFill>
-                  <a:srgbClr val="1F3355"/>
+                  <a:srgbClr val="1F4E6B"/>
                 </a:solidFill>
               </a:rPr>
               <a:t>Conclusions, remedies, and disclosure</a:t>
@@ -3775,7 +3775,7 @@
             <a:r>
               <a:rPr sz="1800">
                 <a:solidFill>
-                  <a:srgbClr val="1F3355"/>
+                  <a:srgbClr val="1F4E6B"/>
                 </a:solidFill>
               </a:rPr>
               <a:t>LLEO is completely broken by an equivalent-key chosen-plaintext attack in 4 queries and a fraction of a second, despite near-ideal statistics.</a:t>
@@ -3790,7 +3790,7 @@
             <a:r>
               <a:rPr sz="1800">
                 <a:solidFill>
-                  <a:srgbClr val="1F3355"/>
+                  <a:srgbClr val="1F4E6B"/>
                 </a:solidFill>
               </a:rPr>
               <a:t>More than one break: the audit flags every fully key-only scheme in an 8-archetype corpus and, on four real published 2023-2025 ciphers, breaks the one key-only design (LSCM-CA) and clears three plaintext-bound ones, one break needing a GF(2)-affine extension.</a:t>
@@ -3805,7 +3805,7 @@
             <a:r>
               <a:rPr sz="1800">
                 <a:solidFill>
-                  <a:srgbClr val="1F3355"/>
+                  <a:srgbClr val="1F4E6B"/>
                 </a:solidFill>
               </a:rPr>
               <a:t>Remedies (standard): (i) tie the keystream to the image (seed the chaos from a SHA-256 hash of the image); (ii) add real diffusion (a chaining rule). The identical attack then recovers 100% of pixels against the key-only cipher but only 0.25% (chance) once the keystream is image-seeded.</a:t>
@@ -3820,7 +3820,7 @@
             <a:r>
               <a:rPr sz="1800">
                 <a:solidFill>
-                  <a:srgbClr val="1F3355"/>
+                  <a:srgbClr val="1F4E6B"/>
                 </a:solidFill>
               </a:rPr>
               <a:t>Statistical scores should support, not replace, an explicit chosen-plaintext argument. Authors of both broken schemes (LLEO and LSCM-CA) emailed at submission; no response yet (responsible disclosure).</a:t>
@@ -3864,7 +3864,7 @@
             <a:r>
               <a:rPr sz="3000" b="1">
                 <a:solidFill>
-                  <a:srgbClr val="1F3355"/>
+                  <a:srgbClr val="1F4E6B"/>
                 </a:solidFill>
               </a:rPr>
               <a:t>Appendix: why the break is sound (invertibility &amp; fidelity)</a:t>
@@ -3902,7 +3902,7 @@
             <a:r>
               <a:rPr sz="1800">
                 <a:solidFill>
-                  <a:srgbClr val="1F3355"/>
+                  <a:srgbClr val="1F4E6B"/>
                 </a:solidFill>
               </a:rPr>
               <a:t>Odd multipliers: LLEO inverts its substitution by a modular conjugate, which forces every multiplier odd (always invertible mod 256). On the reconstruction all are odd and E(0)=0 holds exactly; if even multipliers were allowed the oracle degrades gracefully (about half the positions recovered) rather than returning a wrong inverse.</a:t>
@@ -3917,7 +3917,7 @@
             <a:r>
               <a:rPr sz="1800">
                 <a:solidFill>
-                  <a:srgbClr val="1F3355"/>
+                  <a:srgbClr val="1F4E6B"/>
                 </a:solidFill>
               </a:rPr>
               <a:t>Fidelity: matching entropy/correlation proves nothing. The load-bearing check is that the recovered key predicts fresh ciphertexts exactly, which only a plaintext-independent cipher can.</a:t>
@@ -3932,7 +3932,7 @@
             <a:r>
               <a:rPr sz="1800">
                 <a:solidFill>
-                  <a:srgbClr val="1F3355"/>
+                  <a:srgbClr val="1F4E6B"/>
                 </a:solidFill>
               </a:rPr>
               <a:t>Generality &amp; scale: a very different XOR-and-chain (CBC-like) cipher also falls in 3-4 chosen plaintexts; cost grows only logarithmically with image size (3-4 plaintexts up to 1024x1024).</a:t>
@@ -3976,7 +3976,7 @@
             <a:r>
               <a:rPr sz="3000" b="1">
                 <a:solidFill>
-                  <a:srgbClr val="1F3355"/>
+                  <a:srgbClr val="1F4E6B"/>
                 </a:solidFill>
               </a:rPr>
               <a:t>Selected references</a:t>
@@ -4014,7 +4014,7 @@
             <a:r>
               <a:rPr sz="1800">
                 <a:solidFill>
-                  <a:srgbClr val="1F3355"/>
+                  <a:srgbClr val="1F4E6B"/>
                 </a:solidFill>
               </a:rPr>
               <a:t>J. Jain et al., LLEO chaos-based image-encryption scheme, Optik 327:172304, 2025  (target scheme).</a:t>
@@ -4029,7 +4029,7 @@
             <a:r>
               <a:rPr sz="1800">
                 <a:solidFill>
-                  <a:srgbClr val="1F3355"/>
+                  <a:srgbClr val="1F4E6B"/>
                 </a:solidFill>
               </a:rPr>
               <a:t>C. Li et al., “When an attacker meets a cipher-image,” survey of chaos-cipher breaks, 2019.</a:t>
@@ -4044,7 +4044,7 @@
             <a:r>
               <a:rPr sz="1800">
                 <a:solidFill>
-                  <a:srgbClr val="1F3355"/>
+                  <a:srgbClr val="1F4E6B"/>
                 </a:solidFill>
               </a:rPr>
               <a:t>G. Alvarez and S. Li, “Some basic cryptographic requirements for chaos-based cryptosystems,” 2006.</a:t>
@@ -4059,7 +4059,7 @@
             <a:r>
               <a:rPr sz="1800">
                 <a:solidFill>
-                  <a:srgbClr val="1F3355"/>
+                  <a:srgbClr val="1F4E6B"/>
                 </a:solidFill>
               </a:rPr>
               <a:t>C.-Y. Li and C.-C. Lo, optimal known/chosen-plaintext bound for permutation-only ciphers, 2011.</a:t>
@@ -4074,7 +4074,7 @@
             <a:r>
               <a:rPr sz="1800">
                 <a:solidFill>
-                  <a:srgbClr val="1F3355"/>
+                  <a:srgbClr val="1F4E6B"/>
                 </a:solidFill>
               </a:rPr>
               <a:t>Y. Wu et al., NPCR and UACI randomness tests for image encryption, 2011.</a:t>
@@ -4123,7 +4123,7 @@
             <a:r>
               <a:rPr sz="4000" b="1">
                 <a:solidFill>
-                  <a:srgbClr val="1F3355"/>
+                  <a:srgbClr val="1F4E6B"/>
                 </a:solidFill>
               </a:rPr>
               <a:t>Thank you</a:t>
@@ -4161,7 +4161,7 @@
             <a:r>
               <a:rPr sz="1800">
                 <a:solidFill>
-                  <a:srgbClr val="1F3355"/>
+                  <a:srgbClr val="1F4E6B"/>
                 </a:solidFill>
               </a:rPr>
               <a:t>Questions?  ·  Reproduction and attack code released for verification.</a:t>
@@ -4205,7 +4205,7 @@
             <a:r>
               <a:rPr sz="3000" b="1">
                 <a:solidFill>
-                  <a:srgbClr val="1F3355"/>
+                  <a:srgbClr val="1F4E6B"/>
                 </a:solidFill>
               </a:rPr>
               <a:t>Introduction: chaos image ciphers keep breaking the same way</a:t>
@@ -4243,7 +4243,7 @@
             <a:r>
               <a:rPr sz="1800">
                 <a:solidFill>
-                  <a:srgbClr val="1F3355"/>
+                  <a:srgbClr val="1F4E6B"/>
                 </a:solidFill>
               </a:rPr>
               <a:t>Chaos-based image ciphers scramble a picture using chaotic (random-looking) math. Most follow a permutation–diffusion design: first shuffle the pixels around (confusion), then mask their values with a keystream, a long random-looking sequence the cipher mixes in (diffusion).</a:t>
@@ -4258,7 +4258,7 @@
             <a:r>
               <a:rPr sz="1800">
                 <a:solidFill>
-                  <a:srgbClr val="1F3355"/>
+                  <a:srgbClr val="1F4E6B"/>
                 </a:solidFill>
               </a:rPr>
               <a:t>Recurring lesson: if that keystream depends only on the secret key (never on the image), the whole cipher is one fixed transformation, so an equivalent key (a stand-in that decrypts any image without being the real key) can be recovered from a few chosen plaintexts (images the attacker picks and has the cipher encrypt).</a:t>
@@ -4273,7 +4273,7 @@
             <a:r>
               <a:rPr sz="1800">
                 <a:solidFill>
-                  <a:srgbClr val="1F3355"/>
+                  <a:srgbClr val="1F4E6B"/>
                 </a:solidFill>
               </a:rPr>
               <a:t>Second problem (method): schemes are judged by statistics: entropy (a randomness score), neighbouring-pixel correlation, NPCR/UACI. Near-ideal values are treated as proof of security.</a:t>
@@ -4288,7 +4288,7 @@
             <a:r>
               <a:rPr sz="1600">
                 <a:solidFill>
-                  <a:srgbClr val="555555"/>
+                  <a:srgbClr val="6B7079"/>
                 </a:solidFill>
               </a:rPr>
               <a:t>But none of those scores tests resistance to a chosen-plaintext attack.</a:t>
@@ -4303,7 +4303,7 @@
             <a:r>
               <a:rPr sz="1800">
                 <a:solidFill>
-                  <a:srgbClr val="1F3355"/>
+                  <a:srgbClr val="1F4E6B"/>
                 </a:solidFill>
               </a:rPr>
               <a:t>Why this matters operationally: image ciphers protect real data: medical scans, sealed evidence, access-controlled documents. A break is not a per-image slip but a standing ability to decrypt every future ciphertext of that size, so security must rest on an attack model, not a statistics table.</a:t>
@@ -4318,7 +4318,7 @@
             <a:r>
               <a:rPr sz="1800">
                 <a:solidFill>
-                  <a:srgbClr val="1F3355"/>
+                  <a:srgbClr val="1F4E6B"/>
                 </a:solidFill>
               </a:rPr>
               <a:t>We apply both lessons to a 2025 scheme: “LLEO” (Jain et al., Optik, 2025).</a:t>
@@ -4362,7 +4362,7 @@
             <a:r>
               <a:rPr sz="3000" b="1">
                 <a:solidFill>
-                  <a:srgbClr val="1F3355"/>
+                  <a:srgbClr val="1F4E6B"/>
                 </a:solidFill>
               </a:rPr>
               <a:t>The target: LLEO (Jain et al., Optik 2025)</a:t>
@@ -4424,7 +4424,7 @@
             <a:r>
               <a:rPr sz="1600">
                 <a:solidFill>
-                  <a:srgbClr val="1F3355"/>
+                  <a:srgbClr val="1F4E6B"/>
                 </a:solidFill>
               </a:rPr>
               <a:t>Two chaotic maps (simple formulas whose output looks random: Lorenz and logistic) make the keystream that masks each pixel (multiply by K).</a:t>
@@ -4439,7 +4439,7 @@
             <a:r>
               <a:rPr sz="1600">
                 <a:solidFill>
-                  <a:srgbClr val="1F3355"/>
+                  <a:srgbClr val="1F4E6B"/>
                 </a:solidFill>
               </a:rPr>
               <a:t>Then two Fisher–Yates shuffles (a standard way to randomly reorder a list) rearrange 16 row-blocks, then 16 column-blocks.</a:t>
@@ -4454,7 +4454,7 @@
             <a:r>
               <a:rPr sz="1600">
                 <a:solidFill>
-                  <a:srgbClr val="1F3355"/>
+                  <a:srgbClr val="1F4E6B"/>
                 </a:solidFill>
               </a:rPr>
               <a:t>Every key element comes from the secret key alone, nothing depends on the image X.</a:t>
@@ -4469,7 +4469,7 @@
             <a:r>
               <a:rPr sz="1600">
                 <a:solidFill>
-                  <a:srgbClr val="1F3355"/>
+                  <a:srgbClr val="1F4E6B"/>
                 </a:solidFill>
               </a:rPr>
               <a:t>Called “asymmetric,” but the same keys both encrypt and decrypt: it is really symmetric.</a:t>
@@ -4503,7 +4503,7 @@
             <a:r>
               <a:rPr sz="1200" i="1">
                 <a:solidFill>
-                  <a:srgbClr val="555555"/>
+                  <a:srgbClr val="6B7079"/>
                 </a:solidFill>
               </a:rPr>
               <a:t>LLEO encryption (top) and the equivalent-key attack (bottom).</a:t>
@@ -4547,7 +4547,7 @@
             <a:r>
               <a:rPr sz="3000" b="1">
                 <a:solidFill>
-                  <a:srgbClr val="1F3355"/>
+                  <a:srgbClr val="1F4E6B"/>
                 </a:solidFill>
               </a:rPr>
               <a:t>Key insight: LLEO is one fixed “multiply-and-reorder” map</a:t>
@@ -4585,7 +4585,7 @@
             <a:r>
               <a:rPr sz="1800">
                 <a:solidFill>
-                  <a:srgbClr val="1F3355"/>
+                  <a:srgbClr val="1F4E6B"/>
                 </a:solidFill>
               </a:rPr>
               <a:t>Write the image as a list of n = M×N pixels. Every step is just multiply-and-reorder using arithmetic that wraps around at 256 (like hours on a clock), and is fixed once the key is set.</a:t>
@@ -4600,7 +4600,7 @@
             <a:r>
               <a:rPr sz="1800">
                 <a:solidFill>
-                  <a:srgbClr val="1F3355"/>
+                  <a:srgbClr val="1F4E6B"/>
                 </a:solidFill>
               </a:rPr>
               <a:t>Masking multiplies pixel p by a fixed odd number K[p] (odd, so it can always be divided back out); the two shuffles combine into one fixed reordering of positions.</a:t>
@@ -4615,7 +4615,7 @@
             <a:r>
               <a:rPr sz="1800">
                 <a:solidFill>
-                  <a:srgbClr val="1F3355"/>
+                  <a:srgbClr val="1F4E6B"/>
                 </a:solidFill>
               </a:rPr>
               <a:t>So  C[j] = K[s(j)] · X[s(j)]  (mod 256): each output pixel is exactly one input pixel times a fixed number, a “monomial” map.</a:t>
@@ -4630,7 +4630,7 @@
             <a:r>
               <a:rPr sz="1800">
                 <a:solidFill>
-                  <a:srgbClr val="1F3355"/>
+                  <a:srgbClr val="1F4E6B"/>
                 </a:solidFill>
               </a:rPr>
               <a:t>Two gifts to the attacker: no added constant, and no diffusion (each output pixel depends on only one input pixel).</a:t>
@@ -4674,7 +4674,7 @@
             <a:r>
               <a:rPr sz="3000" b="1">
                 <a:solidFill>
-                  <a:srgbClr val="1F3355"/>
+                  <a:srgbClr val="1F4E6B"/>
                 </a:solidFill>
               </a:rPr>
               <a:t>Four images recover the full map</a:t>
@@ -4712,7 +4712,7 @@
             <a:r>
               <a:rPr sz="1800">
                 <a:solidFill>
-                  <a:srgbClr val="1F3355"/>
+                  <a:srgbClr val="1F4E6B"/>
                 </a:solidFill>
               </a:rPr>
               <a:t>(a) The multiplier, 1 query: encrypt an all-ones image; the output directly reveals K at every position.</a:t>
@@ -4727,7 +4727,7 @@
             <a:r>
               <a:rPr sz="1800">
                 <a:solidFill>
-                  <a:srgbClr val="1F3355"/>
+                  <a:srgbClr val="1F4E6B"/>
                 </a:solidFill>
               </a:rPr>
               <a:t>(b) The reordering, a few queries: encrypt images whose pixels carry their own position number, then divide out the known K to read off where each pixel came from (the map s).</a:t>
@@ -4742,7 +4742,7 @@
             <a:r>
               <a:rPr sz="1800">
                 <a:solidFill>
-                  <a:srgbClr val="1F3355"/>
+                  <a:srgbClr val="1F4E6B"/>
                 </a:solidFill>
               </a:rPr>
               <a:t>The pair (s, K) is the equivalent key. It inverts any ciphertext:  X[s(j)] = K[s(j)]^-1 · C[j].</a:t>
@@ -4757,7 +4757,7 @@
             <a:r>
               <a:rPr sz="1800">
                 <a:solidFill>
-                  <a:srgbClr val="1F3355"/>
+                  <a:srgbClr val="1F4E6B"/>
                 </a:solidFill>
               </a:rPr>
               <a:t>Total cost: 1 + ceil(log_256 MN) chosen plaintexts = just 4 for a 512×512 image, no matter how long the advertised key is.</a:t>
@@ -4772,7 +4772,7 @@
             <a:r>
               <a:rPr sz="1800">
                 <a:solidFill>
-                  <a:srgbClr val="1F3355"/>
+                  <a:srgbClr val="1F4E6B"/>
                 </a:solidFill>
               </a:rPr>
               <a:t>This matches the known best-possible bound for shuffle-only ciphers; adding more rounds or maps doesn't change the form, so the same attack still works.</a:t>
@@ -4816,7 +4816,7 @@
             <a:r>
               <a:rPr sz="3000" b="1">
                 <a:solidFill>
-                  <a:srgbClr val="1F3355"/>
+                  <a:srgbClr val="1F4E6B"/>
                 </a:solidFill>
               </a:rPr>
               <a:t>Experimental setup</a:t>
@@ -4854,7 +4854,7 @@
             <a:r>
               <a:rPr sz="1800">
                 <a:solidFill>
-                  <a:srgbClr val="1F3355"/>
+                  <a:srgbClr val="1F4E6B"/>
                 </a:solidFill>
               </a:rPr>
               <a:t>Reconstructed LLEO from its published description, reimplemented from scratch, no code reused.</a:t>
@@ -4869,7 +4869,7 @@
             <a:r>
               <a:rPr sz="1800">
                 <a:solidFill>
-                  <a:srgbClr val="1F3355"/>
+                  <a:srgbClr val="1F4E6B"/>
                 </a:solidFill>
               </a:rPr>
               <a:t>Four standard 512×512 grayscale images (Cameraman, Moon, Gravel, Brick); one fixed secret key.</a:t>
@@ -4884,7 +4884,7 @@
             <a:r>
               <a:rPr sz="1800">
                 <a:solidFill>
-                  <a:srgbClr val="1F3355"/>
+                  <a:srgbClr val="1F4E6B"/>
                 </a:solidFill>
               </a:rPr>
               <a:t>Verified the reconstruction reproduces LLEO's reported statistics before attacking.</a:t>
@@ -4899,7 +4899,7 @@
             <a:r>
               <a:rPr sz="1800">
                 <a:solidFill>
-                  <a:srgbClr val="1F3355"/>
+                  <a:srgbClr val="1F4E6B"/>
                 </a:solidFill>
               </a:rPr>
               <a:t>All timings single-core wall-clock.</a:t>
@@ -4943,7 +4943,7 @@
             <a:r>
               <a:rPr sz="3000" b="1">
                 <a:solidFill>
-                  <a:srgbClr val="1F3355"/>
+                  <a:srgbClr val="1F4E6B"/>
                 </a:solidFill>
               </a:rPr>
               <a:t>Result: every image recovered pixel-exactly, without the key</a:t>
@@ -5005,7 +5005,7 @@
             <a:r>
               <a:rPr sz="1600">
                 <a:solidFill>
-                  <a:srgbClr val="1F3355"/>
+                  <a:srgbClr val="1F4E6B"/>
                 </a:solidFill>
               </a:rPr>
               <a:t>Only 4 chosen plaintexts per image.</a:t>
@@ -5020,7 +5020,7 @@
             <a:r>
               <a:rPr sz="1600">
                 <a:solidFill>
-                  <a:srgbClr val="1F3355"/>
+                  <a:srgbClr val="1F4E6B"/>
                 </a:solidFill>
               </a:rPr>
               <a:t>Recovery is bit-identical to the original.</a:t>
@@ -5035,7 +5035,7 @@
             <a:r>
               <a:rPr sz="1600">
                 <a:solidFill>
-                  <a:srgbClr val="1F3355"/>
+                  <a:srgbClr val="1F4E6B"/>
                 </a:solidFill>
               </a:rPr>
               <a:t>Decryption in 0.037 s at 512x512 (single core), no key used.</a:t>
@@ -5069,7 +5069,7 @@
             <a:r>
               <a:rPr sz="1200" i="1">
                 <a:solidFill>
-                  <a:srgbClr val="555555"/>
+                  <a:srgbClr val="6B7079"/>
                 </a:solidFill>
               </a:rPr>
               <a:t>Original -&gt; LLEO ciphertext -&gt; key-free recovery (bit-identical), four images.</a:t>
@@ -5113,7 +5113,7 @@
             <a:r>
               <a:rPr sz="3000" b="1">
                 <a:solidFill>
-                  <a:srgbClr val="1F3355"/>
+                  <a:srgbClr val="1F4E6B"/>
                 </a:solidFill>
               </a:rPr>
               <a:t>Good statistics are not security</a:t>
@@ -5195,7 +5195,7 @@
             <a:r>
               <a:rPr sz="1200" i="1">
                 <a:solidFill>
-                  <a:srgbClr val="555555"/>
+                  <a:srgbClr val="6B7079"/>
                 </a:solidFill>
               </a:rPr>
               <a:t>Flat histogram of cipher pixel values</a:t>
@@ -5229,7 +5229,7 @@
             <a:r>
               <a:rPr sz="1200" i="1">
                 <a:solidFill>
-                  <a:srgbClr val="555555"/>
+                  <a:srgbClr val="6B7079"/>
                 </a:solidFill>
               </a:rPr>
               <a:t>Neighbouring-pixel pattern: structure -&gt; uniform</a:t>
@@ -5267,7 +5267,7 @@
             <a:r>
               <a:rPr sz="1500">
                 <a:solidFill>
-                  <a:srgbClr val="1F3355"/>
+                  <a:srgbClr val="1F4E6B"/>
                 </a:solidFill>
               </a:rPr>
               <a:t>Entropy (a randomness score, maximum 8) rises 7.23 -&gt; 7.99; neighbouring pixels go from very alike to almost unrelated (correlation ~ 0); the spread of pixel values is flat.</a:t>
@@ -5282,7 +5282,7 @@
             <a:r>
               <a:rPr sz="1500">
                 <a:solidFill>
-                  <a:srgbClr val="1F3355"/>
+                  <a:srgbClr val="1F4E6B"/>
                 </a:solidFill>
               </a:rPr>
               <a:t>By every usual yardstick LLEO looks strong, yet it is broken in 4 queries.</a:t>
@@ -5326,7 +5326,7 @@
             <a:r>
               <a:rPr sz="3000" b="1">
                 <a:solidFill>
-                  <a:srgbClr val="1F3355"/>
+                  <a:srgbClr val="1F4E6B"/>
                 </a:solidFill>
               </a:rPr>
               <a:t>The “differential” score (NPCR) is illusory</a:t>
@@ -5388,7 +5388,7 @@
             <a:r>
               <a:rPr sz="1600">
                 <a:solidFill>
-                  <a:srgbClr val="1F3355"/>
+                  <a:srgbClr val="1F4E6B"/>
                 </a:solidFill>
               </a:rPr>
               <a:t>NPCR = the percent of pixels that change when you flip a single input pixel. A good cipher should change almost all of them (~99.6%), and LLEO reports ~99.6%.</a:t>
@@ -5403,7 +5403,7 @@
             <a:r>
               <a:rPr sz="1600">
                 <a:solidFill>
-                  <a:srgbClr val="1F3355"/>
+                  <a:srgbClr val="1F4E6B"/>
                 </a:solidFill>
               </a:rPr>
               <a:t>But with no diffusion, flipping one input pixel changes exactly one output pixel, so the true value is 100/MN ~ 0.0004%, five orders of magnitude smaller.</a:t>
@@ -5418,7 +5418,7 @@
             <a:r>
               <a:rPr sz="1600">
                 <a:solidFill>
-                  <a:srgbClr val="1F3355"/>
+                  <a:srgbClr val="1F4E6B"/>
                 </a:solidFill>
               </a:rPr>
               <a:t>The 99.6% is really just the difference between two unrelated images (here 99.88%), which any near-uniform cipher reaches and which says nothing about security.</a:t>
@@ -5452,7 +5452,7 @@
             <a:r>
               <a:rPr sz="1200" i="1">
                 <a:solidFill>
-                  <a:srgbClr val="555555"/>
+                  <a:srgbClr val="6B7079"/>
                 </a:solidFill>
               </a:rPr>
               <a:t>Difference image |C_0-C_1|: dark = unchanged, bright = changed (one fixed key).</a:t>
